--- a/FINAL_THESIS/thesis_presentation.pptx
+++ b/FINAL_THESIS/thesis_presentation.pptx
@@ -1,5 +1,2531 @@
 
-<file path=ppt/presentation.xml><?xml version="1.0" encoding="utf-8"?>
+<file path=docProps\app.xml><?xml version="1.0" encoding="utf-8"?>
+<Properties xmlns="http://schemas.openxmlformats.org/officeDocument/2006/extended-properties" xmlns:vt="http://schemas.openxmlformats.org/officeDocument/2006/docPropsVTypes">
+  <TotalTime>0</TotalTime>
+  <Words>0</Words>
+  <Application>Microsoft Office PowerPoint</Application>
+  <PresentationFormat>On-screen Show (16:9)</PresentationFormat>
+  <Paragraphs>0</Paragraphs>
+  <Slides>18</Slides>
+  <Notes>18</Notes>
+  <HiddenSlides>0</HiddenSlides>
+  <MMClips>0</MMClips>
+  <ScaleCrop>false</ScaleCrop>
+  <HeadingPairs>
+    <vt:vector size="6" baseType="variant">
+      <vt:variant>
+        <vt:lpstr>Fonts Used</vt:lpstr>
+      </vt:variant>
+      <vt:variant>
+        <vt:i4>2</vt:i4>
+      </vt:variant>
+      <vt:variant>
+        <vt:lpstr>Theme</vt:lpstr>
+      </vt:variant>
+      <vt:variant>
+        <vt:i4>1</vt:i4>
+      </vt:variant>
+      <vt:variant>
+        <vt:lpstr>Slide Titles</vt:lpstr>
+      </vt:variant>
+      <vt:variant>
+        <vt:i4>18</vt:i4>
+      </vt:variant>
+    </vt:vector>
+  </HeadingPairs>
+  <TitlesOfParts>
+    <vt:vector size="21" baseType="lpstr">
+      <vt:lpstr>Arial</vt:lpstr>
+      <vt:lpstr>Calibri</vt:lpstr>
+      <vt:lpstr>Office Theme</vt:lpstr>
+      <vt:lpstr>Slide 1</vt:lpstr>
+      <vt:lpstr>Slide 2</vt:lpstr>
+      <vt:lpstr>Slide 3</vt:lpstr>
+      <vt:lpstr>Slide 4</vt:lpstr>
+      <vt:lpstr>Slide 5</vt:lpstr>
+      <vt:lpstr>Slide 6</vt:lpstr>
+      <vt:lpstr>Slide 7</vt:lpstr>
+      <vt:lpstr>Slide 8</vt:lpstr>
+      <vt:lpstr>Slide 9</vt:lpstr>
+      <vt:lpstr>Slide 10</vt:lpstr>
+      <vt:lpstr>Slide 11</vt:lpstr>
+      <vt:lpstr>Slide 12</vt:lpstr>
+      <vt:lpstr>Slide 13</vt:lpstr>
+      <vt:lpstr>Slide 14</vt:lpstr>
+      <vt:lpstr>Slide 15</vt:lpstr>
+      <vt:lpstr>Slide 16</vt:lpstr>
+      <vt:lpstr>Slide 17</vt:lpstr>
+      <vt:lpstr>Slide 18</vt:lpstr>
+    </vt:vector>
+  </TitlesOfParts>
+  <Company>PptxGenJS</Company>
+  <LinksUpToDate>false</LinksUpToDate>
+  <SharedDoc>false</SharedDoc>
+  <HyperlinksChanged>false</HyperlinksChanged>
+  <AppVersion>16.0000</AppVersion>
+</Properties>
+</file>
+
+<file path=docProps\core.xml><?xml version="1.0" encoding="utf-8"?>
+<cp:coreProperties xmlns:cp="http://schemas.openxmlformats.org/package/2006/metadata/core-properties" xmlns:dc="http://purl.org/dc/elements/1.1/" xmlns:dcterms="http://purl.org/dc/terms/" xmlns:dcmitype="http://purl.org/dc/dcmitype/" xmlns:xsi="http://www.w3.org/2001/XMLSchema-instance">
+  <dc:title>PptxGenJS Presentation</dc:title>
+  <dc:subject>PptxGenJS Presentation</dc:subject>
+  <dc:creator>PptxGenJS</dc:creator>
+  <cp:lastModifiedBy>PptxGenJS</cp:lastModifiedBy>
+  <cp:revision>1</cp:revision>
+  <dcterms:created xsi:type="dcterms:W3CDTF">2026-04-30T19:37:34Z</dcterms:created>
+  <dcterms:modified xsi:type="dcterms:W3CDTF">2026-04-30T19:37:34Z</dcterms:modified>
+</cp:coreProperties>
+</file>
+
+<file path=ppt\notesMasters\notesMaster1.xml><?xml version="1.0" encoding="utf-8"?>
+<p:notesMaster xmlns:a="http://schemas.openxmlformats.org/drawingml/2006/main" xmlns:r="http://schemas.openxmlformats.org/officeDocument/2006/relationships" xmlns:p="http://schemas.openxmlformats.org/presentationml/2006/main">
+  <p:cSld>
+    <p:bg>
+      <p:bgRef idx="1001">
+        <a:schemeClr val="bg1"/>
+      </p:bgRef>
+    </p:bg>
+    <p:spTree>
+      <p:nvGrpSpPr>
+        <p:cNvPr id="1" name=""/>
+        <p:cNvGrpSpPr/>
+        <p:nvPr/>
+      </p:nvGrpSpPr>
+      <p:grpSpPr>
+        <a:xfrm>
+          <a:off x="0" y="0"/>
+          <a:ext cx="0" cy="0"/>
+          <a:chOff x="0" y="0"/>
+          <a:chExt cx="0" cy="0"/>
+        </a:xfrm>
+      </p:grpSpPr>
+      <p:sp>
+        <p:nvSpPr>
+          <p:cNvPr id="2" name="Header Placeholder 1"/>
+          <p:cNvSpPr>
+            <a:spLocks noGrp="1"/>
+          </p:cNvSpPr>
+          <p:nvPr>
+            <p:ph type="hdr" sz="quarter"/>
+          </p:nvPr>
+        </p:nvSpPr>
+        <p:spPr>
+          <a:xfrm>
+            <a:off x="0" y="0"/>
+            <a:ext cx="2971800" cy="458788"/>
+          </a:xfrm>
+          <a:prstGeom prst="rect">
+            <a:avLst/>
+          </a:prstGeom>
+        </p:spPr>
+        <p:txBody>
+          <a:bodyPr vert="horz" lIns="91440" tIns="45720" rIns="91440" bIns="45720" rtlCol="0"/>
+          <a:lstStyle>
+            <a:lvl1pPr algn="l">
+              <a:defRPr sz="1200"/>
+            </a:lvl1pPr>
+          </a:lstStyle>
+          <a:p>
+            <a:endParaRPr lang="en-US"/>
+          </a:p>
+        </p:txBody>
+      </p:sp>
+      <p:sp>
+        <p:nvSpPr>
+          <p:cNvPr id="3" name="Date Placeholder 2"/>
+          <p:cNvSpPr>
+            <a:spLocks noGrp="1"/>
+          </p:cNvSpPr>
+          <p:nvPr>
+            <p:ph type="dt" idx="1"/>
+          </p:nvPr>
+        </p:nvSpPr>
+        <p:spPr>
+          <a:xfrm>
+            <a:off x="3884613" y="0"/>
+            <a:ext cx="2971800" cy="458788"/>
+          </a:xfrm>
+          <a:prstGeom prst="rect">
+            <a:avLst/>
+          </a:prstGeom>
+        </p:spPr>
+        <p:txBody>
+          <a:bodyPr vert="horz" lIns="91440" tIns="45720" rIns="91440" bIns="45720" rtlCol="0"/>
+          <a:lstStyle>
+            <a:lvl1pPr algn="r">
+              <a:defRPr sz="1200"/>
+            </a:lvl1pPr>
+          </a:lstStyle>
+          <a:p>
+            <a:fld id="{5282F153-3F37-0F45-9E97-73ACFA13230C}" type="datetimeFigureOut">
+              <a:rPr lang="en-US"/>
+              <a:t>7/23/19</a:t>
+            </a:fld>
+            <a:endParaRPr lang="en-US"/>
+          </a:p>
+        </p:txBody>
+      </p:sp>
+      <p:sp>
+        <p:nvSpPr>
+          <p:cNvPr id="4" name="Slide Image Placeholder 3"/>
+          <p:cNvSpPr>
+            <a:spLocks noGrp="1" noRot="1" noChangeAspect="1"/>
+          </p:cNvSpPr>
+          <p:nvPr>
+            <p:ph type="sldImg" idx="2"/>
+          </p:nvPr>
+        </p:nvSpPr>
+        <p:spPr>
+          <a:xfrm>
+            <a:off x="685800" y="1143000"/>
+            <a:ext cx="5486400" cy="3086100"/>
+          </a:xfrm>
+          <a:prstGeom prst="rect">
+            <a:avLst/>
+          </a:prstGeom>
+          <a:noFill/>
+          <a:ln w="12700">
+            <a:solidFill>
+              <a:prstClr val="black"/>
+            </a:solidFill>
+          </a:ln>
+        </p:spPr>
+        <p:txBody>
+          <a:bodyPr vert="horz" lIns="91440" tIns="45720" rIns="91440" bIns="45720" rtlCol="0" anchor="ctr"/>
+          <a:lstStyle/>
+          <a:p>
+            <a:endParaRPr lang="en-US"/>
+          </a:p>
+        </p:txBody>
+      </p:sp>
+      <p:sp>
+        <p:nvSpPr>
+          <p:cNvPr id="5" name="Notes Placeholder 4"/>
+          <p:cNvSpPr>
+            <a:spLocks noGrp="1"/>
+          </p:cNvSpPr>
+          <p:nvPr>
+            <p:ph type="body" sz="quarter" idx="3"/>
+          </p:nvPr>
+        </p:nvSpPr>
+        <p:spPr>
+          <a:xfrm>
+            <a:off x="685800" y="4400550"/>
+            <a:ext cx="5486400" cy="3600450"/>
+          </a:xfrm>
+          <a:prstGeom prst="rect">
+            <a:avLst/>
+          </a:prstGeom>
+        </p:spPr>
+        <p:txBody>
+          <a:bodyPr vert="horz" lIns="91440" tIns="45720" rIns="91440" bIns="45720" rtlCol="0"/>
+          <a:lstStyle/>
+          <a:p>
+            <a:pPr lvl="0"/>
+            <a:r>
+              <a:rPr lang="en-US"/>
+              <a:t>Click to edit Master text styles</a:t>
+            </a:r>
+          </a:p>
+          <a:p>
+            <a:pPr lvl="1"/>
+            <a:r>
+              <a:rPr lang="en-US"/>
+              <a:t>Second level</a:t>
+            </a:r>
+          </a:p>
+          <a:p>
+            <a:pPr lvl="2"/>
+            <a:r>
+              <a:rPr lang="en-US"/>
+              <a:t>Third level</a:t>
+            </a:r>
+          </a:p>
+          <a:p>
+            <a:pPr lvl="3"/>
+            <a:r>
+              <a:rPr lang="en-US"/>
+              <a:t>Fourth level</a:t>
+            </a:r>
+          </a:p>
+          <a:p>
+            <a:pPr lvl="4"/>
+            <a:r>
+              <a:rPr lang="en-US"/>
+              <a:t>Fifth level</a:t>
+            </a:r>
+          </a:p>
+        </p:txBody>
+      </p:sp>
+      <p:sp>
+        <p:nvSpPr>
+          <p:cNvPr id="6" name="Footer Placeholder 5"/>
+          <p:cNvSpPr>
+            <a:spLocks noGrp="1"/>
+          </p:cNvSpPr>
+          <p:nvPr>
+            <p:ph type="ftr" sz="quarter" idx="4"/>
+          </p:nvPr>
+        </p:nvSpPr>
+        <p:spPr>
+          <a:xfrm>
+            <a:off x="0" y="8685213"/>
+            <a:ext cx="2971800" cy="458787"/>
+          </a:xfrm>
+          <a:prstGeom prst="rect">
+            <a:avLst/>
+          </a:prstGeom>
+        </p:spPr>
+        <p:txBody>
+          <a:bodyPr vert="horz" lIns="91440" tIns="45720" rIns="91440" bIns="45720" rtlCol="0" anchor="b"/>
+          <a:lstStyle>
+            <a:lvl1pPr algn="l">
+              <a:defRPr sz="1200"/>
+            </a:lvl1pPr>
+          </a:lstStyle>
+          <a:p>
+            <a:endParaRPr lang="en-US"/>
+          </a:p>
+        </p:txBody>
+      </p:sp>
+      <p:sp>
+        <p:nvSpPr>
+          <p:cNvPr id="7" name="Slide Number Placeholder 6"/>
+          <p:cNvSpPr>
+            <a:spLocks noGrp="1"/>
+          </p:cNvSpPr>
+          <p:nvPr>
+            <p:ph type="sldNum" sz="quarter" idx="5"/>
+          </p:nvPr>
+        </p:nvSpPr>
+        <p:spPr>
+          <a:xfrm>
+            <a:off x="3884613" y="8685213"/>
+            <a:ext cx="2971800" cy="458787"/>
+          </a:xfrm>
+          <a:prstGeom prst="rect">
+            <a:avLst/>
+          </a:prstGeom>
+        </p:spPr>
+        <p:txBody>
+          <a:bodyPr vert="horz" lIns="91440" tIns="45720" rIns="91440" bIns="45720" rtlCol="0" anchor="b"/>
+          <a:lstStyle>
+            <a:lvl1pPr algn="r">
+              <a:defRPr sz="1200"/>
+            </a:lvl1pPr>
+          </a:lstStyle>
+          <a:p>
+            <a:fld id="{CE5E9CC1-C706-0F49-92D6-E571CC5EEA8F}" type="slidenum">
+              <a:rPr lang="en-US"/>
+              <a:t>‹#›</a:t>
+            </a:fld>
+            <a:endParaRPr lang="en-US"/>
+          </a:p>
+        </p:txBody>
+      </p:sp>
+    </p:spTree>
+    <p:extLst>
+      <p:ext uri="{BB962C8B-B14F-4D97-AF65-F5344CB8AC3E}">
+        <p14:creationId xmlns:p14="http://schemas.microsoft.com/office/powerpoint/2010/main" val="1024086991"/>
+      </p:ext>
+    </p:extLst>
+  </p:cSld>
+  <p:clrMap bg1="lt1" tx1="dk1" bg2="lt2" tx2="dk2" accent1="accent1" accent2="accent2" accent3="accent3" accent4="accent4" accent5="accent5" accent6="accent6" hlink="hlink" folHlink="folHlink"/>
+  <p:notesStyle>
+    <a:lvl1pPr marL="0" algn="l" defTabSz="914400" rtl="0" eaLnBrk="1" latinLnBrk="0" hangingPunct="1">
+      <a:defRPr sz="1200" kern="1200">
+        <a:solidFill>
+          <a:schemeClr val="tx1"/>
+        </a:solidFill>
+        <a:latin typeface="+mn-lt"/>
+        <a:ea typeface="+mn-ea"/>
+        <a:cs typeface="+mn-cs"/>
+      </a:defRPr>
+    </a:lvl1pPr>
+    <a:lvl2pPr marL="457200" algn="l" defTabSz="914400" rtl="0" eaLnBrk="1" latinLnBrk="0" hangingPunct="1">
+      <a:defRPr sz="1200" kern="1200">
+        <a:solidFill>
+          <a:schemeClr val="tx1"/>
+        </a:solidFill>
+        <a:latin typeface="+mn-lt"/>
+        <a:ea typeface="+mn-ea"/>
+        <a:cs typeface="+mn-cs"/>
+      </a:defRPr>
+    </a:lvl2pPr>
+    <a:lvl3pPr marL="914400" algn="l" defTabSz="914400" rtl="0" eaLnBrk="1" latinLnBrk="0" hangingPunct="1">
+      <a:defRPr sz="1200" kern="1200">
+        <a:solidFill>
+          <a:schemeClr val="tx1"/>
+        </a:solidFill>
+        <a:latin typeface="+mn-lt"/>
+        <a:ea typeface="+mn-ea"/>
+        <a:cs typeface="+mn-cs"/>
+      </a:defRPr>
+    </a:lvl3pPr>
+    <a:lvl4pPr marL="1371600" algn="l" defTabSz="914400" rtl="0" eaLnBrk="1" latinLnBrk="0" hangingPunct="1">
+      <a:defRPr sz="1200" kern="1200">
+        <a:solidFill>
+          <a:schemeClr val="tx1"/>
+        </a:solidFill>
+        <a:latin typeface="+mn-lt"/>
+        <a:ea typeface="+mn-ea"/>
+        <a:cs typeface="+mn-cs"/>
+      </a:defRPr>
+    </a:lvl4pPr>
+    <a:lvl5pPr marL="1828800" algn="l" defTabSz="914400" rtl="0" eaLnBrk="1" latinLnBrk="0" hangingPunct="1">
+      <a:defRPr sz="1200" kern="1200">
+        <a:solidFill>
+          <a:schemeClr val="tx1"/>
+        </a:solidFill>
+        <a:latin typeface="+mn-lt"/>
+        <a:ea typeface="+mn-ea"/>
+        <a:cs typeface="+mn-cs"/>
+      </a:defRPr>
+    </a:lvl5pPr>
+    <a:lvl6pPr marL="2286000" algn="l" defTabSz="914400" rtl="0" eaLnBrk="1" latinLnBrk="0" hangingPunct="1">
+      <a:defRPr sz="1200" kern="1200">
+        <a:solidFill>
+          <a:schemeClr val="tx1"/>
+        </a:solidFill>
+        <a:latin typeface="+mn-lt"/>
+        <a:ea typeface="+mn-ea"/>
+        <a:cs typeface="+mn-cs"/>
+      </a:defRPr>
+    </a:lvl6pPr>
+    <a:lvl7pPr marL="2743200" algn="l" defTabSz="914400" rtl="0" eaLnBrk="1" latinLnBrk="0" hangingPunct="1">
+      <a:defRPr sz="1200" kern="1200">
+        <a:solidFill>
+          <a:schemeClr val="tx1"/>
+        </a:solidFill>
+        <a:latin typeface="+mn-lt"/>
+        <a:ea typeface="+mn-ea"/>
+        <a:cs typeface="+mn-cs"/>
+      </a:defRPr>
+    </a:lvl7pPr>
+    <a:lvl8pPr marL="3200400" algn="l" defTabSz="914400" rtl="0" eaLnBrk="1" latinLnBrk="0" hangingPunct="1">
+      <a:defRPr sz="1200" kern="1200">
+        <a:solidFill>
+          <a:schemeClr val="tx1"/>
+        </a:solidFill>
+        <a:latin typeface="+mn-lt"/>
+        <a:ea typeface="+mn-ea"/>
+        <a:cs typeface="+mn-cs"/>
+      </a:defRPr>
+    </a:lvl8pPr>
+    <a:lvl9pPr marL="3657600" algn="l" defTabSz="914400" rtl="0" eaLnBrk="1" latinLnBrk="0" hangingPunct="1">
+      <a:defRPr sz="1200" kern="1200">
+        <a:solidFill>
+          <a:schemeClr val="tx1"/>
+        </a:solidFill>
+        <a:latin typeface="+mn-lt"/>
+        <a:ea typeface="+mn-ea"/>
+        <a:cs typeface="+mn-cs"/>
+      </a:defRPr>
+    </a:lvl9pPr>
+  </p:notesStyle>
+</p:notesMaster>
+</file>
+
+<file path=ppt\notesSlides\notesSlide1.xml><?xml version="1.0" encoding="utf-8"?>
+<p:notes xmlns:a="http://schemas.openxmlformats.org/drawingml/2006/main" xmlns:r="http://schemas.openxmlformats.org/officeDocument/2006/relationships" xmlns:p="http://schemas.openxmlformats.org/presentationml/2006/main">
+  <p:cSld>
+    <p:spTree>
+      <p:nvGrpSpPr>
+        <p:cNvPr id="1" name=""/>
+        <p:cNvGrpSpPr/>
+        <p:nvPr/>
+      </p:nvGrpSpPr>
+      <p:grpSpPr>
+        <a:xfrm>
+          <a:off x="0" y="0"/>
+          <a:ext cx="0" cy="0"/>
+          <a:chOff x="0" y="0"/>
+          <a:chExt cx="0" cy="0"/>
+        </a:xfrm>
+      </p:grpSpPr>
+      <p:sp>
+        <p:nvSpPr>
+          <p:cNvPr id="2" name="Slide Image Placeholder 1"/>
+          <p:cNvSpPr>
+            <a:spLocks noGrp="1" noRot="1" noChangeAspect="1"/>
+          </p:cNvSpPr>
+          <p:nvPr>
+            <p:ph type="sldImg"/>
+          </p:nvPr>
+        </p:nvSpPr>
+        <p:spPr/>
+      </p:sp>
+      <p:sp>
+        <p:nvSpPr>
+          <p:cNvPr id="3" name="Notes Placeholder 2"/>
+          <p:cNvSpPr>
+            <a:spLocks noGrp="1"/>
+          </p:cNvSpPr>
+          <p:nvPr>
+            <p:ph type="body" idx="1"/>
+          </p:nvPr>
+        </p:nvSpPr>
+        <p:spPr/>
+        <p:txBody>
+          <a:bodyPr/>
+          <a:lstStyle/>
+          <a:p>
+            <a:r>
+              <a:rPr lang="en-US" dirty="0" sz="1200"/>
+              <a:t>Start by greeting the panel and audience.</a:t>
+            </a:r>
+          </a:p>
+          <a:p>
+            <a:r>
+              <a:rPr lang="en-US" dirty="0" sz="1200"/>
+              <a:t>Say: 'Good morning/afternoon. We are Cart Jeuiel Agno, Aira Mae Pilor, and Christian Eduard Ylagan, from BS Computer Engineering. Our study is called SnoozeGuard — a system that uses a smartphone camera to detect if a driver is getting sleepy, and alerts them before anything bad happens.'</a:t>
+            </a:r>
+          </a:p>
+          <a:p>
+            <a:r>
+              <a:rPr lang="en-US" dirty="0" sz="1200"/>
+              <a:t>Keep your tone calm and confident. You may briefly mention your adviser, Engr. Jezer Ilao.</a:t>
+            </a:r>
+          </a:p>
+          <a:p>
+            <a:r>
+              <a:rPr lang="en-US" dirty="0" sz="1200"/>
+              <a:t>Wait for the audience to settle before moving to the next slide.</a:t>
+            </a:r>
+          </a:p>
+        </p:txBody>
+      </p:sp>
+      <p:sp>
+        <p:nvSpPr>
+          <p:cNvPr id="4" name="Slide Number Placeholder 3"/>
+          <p:cNvSpPr>
+            <a:spLocks noGrp="1"/>
+          </p:cNvSpPr>
+          <p:nvPr>
+            <p:ph type="sldNum" sz="quarter" idx="10"/>
+          </p:nvPr>
+        </p:nvSpPr>
+        <p:spPr/>
+        <p:txBody>
+          <a:bodyPr/>
+          <a:lstStyle/>
+          <a:p>
+            <a:fld id="{F7021451-1387-4CA6-816F-3879F97B5CBC}" type="slidenum">
+              <a:rPr lang="en-US"/>
+              <a:t>1</a:t>
+            </a:fld>
+            <a:endParaRPr lang="en-US"/>
+          </a:p>
+        </p:txBody>
+      </p:sp>
+    </p:spTree>
+    <p:extLst>
+      <p:ext uri="{BB962C8B-B14F-4D97-AF65-F5344CB8AC3E}">
+        <p14:creationId xmlns:p14="http://schemas.microsoft.com/office/powerpoint/2010/main" val="1024086991"/>
+      </p:ext>
+    </p:extLst>
+  </p:cSld>
+  <p:clrMapOvr>
+    <a:masterClrMapping/>
+  </p:clrMapOvr>
+</p:notes>
+</file>
+
+<file path=ppt\notesSlides\notesSlide10.xml><?xml version="1.0" encoding="utf-8"?>
+<p:notes xmlns:a="http://schemas.openxmlformats.org/drawingml/2006/main" xmlns:r="http://schemas.openxmlformats.org/officeDocument/2006/relationships" xmlns:p="http://schemas.openxmlformats.org/presentationml/2006/main">
+  <p:cSld>
+    <p:spTree>
+      <p:nvGrpSpPr>
+        <p:cNvPr id="1" name=""/>
+        <p:cNvGrpSpPr/>
+        <p:nvPr/>
+      </p:nvGrpSpPr>
+      <p:grpSpPr>
+        <a:xfrm>
+          <a:off x="0" y="0"/>
+          <a:ext cx="0" cy="0"/>
+          <a:chOff x="0" y="0"/>
+          <a:chExt cx="0" cy="0"/>
+        </a:xfrm>
+      </p:grpSpPr>
+      <p:sp>
+        <p:nvSpPr>
+          <p:cNvPr id="2" name="Slide Image Placeholder 1"/>
+          <p:cNvSpPr>
+            <a:spLocks noGrp="1" noRot="1" noChangeAspect="1"/>
+          </p:cNvSpPr>
+          <p:nvPr>
+            <p:ph type="sldImg"/>
+          </p:nvPr>
+        </p:nvSpPr>
+        <p:spPr/>
+      </p:sp>
+      <p:sp>
+        <p:nvSpPr>
+          <p:cNvPr id="3" name="Notes Placeholder 2"/>
+          <p:cNvSpPr>
+            <a:spLocks noGrp="1"/>
+          </p:cNvSpPr>
+          <p:nvPr>
+            <p:ph type="body" idx="1"/>
+          </p:nvPr>
+        </p:nvSpPr>
+        <p:spPr/>
+        <p:txBody>
+          <a:bodyPr/>
+          <a:lstStyle/>
+          <a:p>
+            <a:r>
+              <a:rPr lang="en-US" dirty="0" sz="1200"/>
+              <a:t>This slide explains how the IoT device talks to the cloud and the phone.</a:t>
+            </a:r>
+          </a:p>
+          <a:p>
+            <a:r>
+              <a:rPr lang="en-US" dirty="0" sz="1200"/>
+              <a:t>Say: 'The main connection is WiFi. The device subscribes to a topic on our MQTT broker — HiveMQ Cloud — and listens for commands. When the app sends an alert, the cloud pushes it to the device immediately.'</a:t>
+            </a:r>
+          </a:p>
+          <a:p>
+            <a:r>
+              <a:rPr lang="en-US" dirty="0" sz="1200"/>
+              <a:t>'If WiFi is not available, the device switches to Bluetooth. The phone can send commands directly to the device via Bluetooth Low Energy, so alerts still work even without internet.'</a:t>
+            </a:r>
+          </a:p>
+          <a:p>
+            <a:r>
+              <a:rPr lang="en-US" dirty="0" sz="1200"/>
+              <a:t>Point to the heartbeat: 'Every 5 seconds, the device sends a small ping to the server. This is how we know if the device is online or offline in real time.'</a:t>
+            </a:r>
+          </a:p>
+          <a:p>
+            <a:r>
+              <a:rPr lang="en-US" dirty="0" sz="1200"/>
+              <a:t>Keep this simple — just say the device works through WiFi primarily, and Bluetooth as a backup.</a:t>
+            </a:r>
+          </a:p>
+        </p:txBody>
+      </p:sp>
+      <p:sp>
+        <p:nvSpPr>
+          <p:cNvPr id="4" name="Slide Number Placeholder 3"/>
+          <p:cNvSpPr>
+            <a:spLocks noGrp="1"/>
+          </p:cNvSpPr>
+          <p:nvPr>
+            <p:ph type="sldNum" sz="quarter" idx="10"/>
+          </p:nvPr>
+        </p:nvSpPr>
+        <p:spPr/>
+        <p:txBody>
+          <a:bodyPr/>
+          <a:lstStyle/>
+          <a:p>
+            <a:fld id="{F7021451-1387-4CA6-816F-3879F97B5CBC}" type="slidenum">
+              <a:rPr lang="en-US"/>
+              <a:t>10</a:t>
+            </a:fld>
+            <a:endParaRPr lang="en-US"/>
+          </a:p>
+        </p:txBody>
+      </p:sp>
+    </p:spTree>
+    <p:extLst>
+      <p:ext uri="{BB962C8B-B14F-4D97-AF65-F5344CB8AC3E}">
+        <p14:creationId xmlns:p14="http://schemas.microsoft.com/office/powerpoint/2010/main" val="1024086991"/>
+      </p:ext>
+    </p:extLst>
+  </p:cSld>
+  <p:clrMapOvr>
+    <a:masterClrMapping/>
+  </p:clrMapOvr>
+</p:notes>
+</file>
+
+<file path=ppt\notesSlides\notesSlide11.xml><?xml version="1.0" encoding="utf-8"?>
+<p:notes xmlns:a="http://schemas.openxmlformats.org/drawingml/2006/main" xmlns:r="http://schemas.openxmlformats.org/officeDocument/2006/relationships" xmlns:p="http://schemas.openxmlformats.org/presentationml/2006/main">
+  <p:cSld>
+    <p:spTree>
+      <p:nvGrpSpPr>
+        <p:cNvPr id="1" name=""/>
+        <p:cNvGrpSpPr/>
+        <p:nvPr/>
+      </p:nvGrpSpPr>
+      <p:grpSpPr>
+        <a:xfrm>
+          <a:off x="0" y="0"/>
+          <a:ext cx="0" cy="0"/>
+          <a:chOff x="0" y="0"/>
+          <a:chExt cx="0" cy="0"/>
+        </a:xfrm>
+      </p:grpSpPr>
+      <p:sp>
+        <p:nvSpPr>
+          <p:cNvPr id="2" name="Slide Image Placeholder 1"/>
+          <p:cNvSpPr>
+            <a:spLocks noGrp="1" noRot="1" noChangeAspect="1"/>
+          </p:cNvSpPr>
+          <p:nvPr>
+            <p:ph type="sldImg"/>
+          </p:nvPr>
+        </p:nvSpPr>
+        <p:spPr/>
+      </p:sp>
+      <p:sp>
+        <p:nvSpPr>
+          <p:cNvPr id="3" name="Notes Placeholder 2"/>
+          <p:cNvSpPr>
+            <a:spLocks noGrp="1"/>
+          </p:cNvSpPr>
+          <p:nvPr>
+            <p:ph type="body" idx="1"/>
+          </p:nvPr>
+        </p:nvSpPr>
+        <p:spPr/>
+        <p:txBody>
+          <a:bodyPr/>
+          <a:lstStyle/>
+          <a:p>
+            <a:r>
+              <a:rPr lang="en-US" dirty="0" sz="1200"/>
+              <a:t>This slide shows what happens when the driver reaches a critical drowsiness level and does not dismiss the alert.</a:t>
+            </a:r>
+          </a:p>
+          <a:p>
+            <a:r>
+              <a:rPr lang="en-US" dirty="0" sz="1200"/>
+              <a:t>Walk through each step clearly:</a:t>
+            </a:r>
+          </a:p>
+          <a:p>
+            <a:r>
+              <a:rPr lang="en-US" dirty="0" sz="1200"/>
+              <a:t>Step 1: Driver reaches level 9 or 10 — the alert modal opens on screen.</a:t>
+            </a:r>
+          </a:p>
+          <a:p>
+            <a:r>
+              <a:rPr lang="en-US" dirty="0" sz="1200"/>
+              <a:t>Step 2: A 120-second countdown starts. On the web version, it is 30 seconds.</a:t>
+            </a:r>
+          </a:p>
+          <a:p>
+            <a:r>
+              <a:rPr lang="en-US" dirty="0" sz="1200"/>
+              <a:t>Step 3: If the driver does not tap dismiss before the timer runs out, the emergency pipeline fires.</a:t>
+            </a:r>
+          </a:p>
+          <a:p>
+            <a:r>
+              <a:rPr lang="en-US" dirty="0" sz="1200"/>
+              <a:t>Step 4: The app captures the driver's GPS location.</a:t>
+            </a:r>
+          </a:p>
+          <a:p>
+            <a:r>
+              <a:rPr lang="en-US" dirty="0" sz="1200"/>
+              <a:t>Step 5: A push notification is sent to the emergency contact's phone.</a:t>
+            </a:r>
+          </a:p>
+          <a:p>
+            <a:r>
+              <a:rPr lang="en-US" dirty="0" sz="1200"/>
+              <a:t>Step 6: If SMS is enabled in the admin settings, an SMS is also sent through PhilSMS.</a:t>
+            </a:r>
+          </a:p>
+          <a:p>
+            <a:r>
+              <a:rPr lang="en-US" dirty="0" sz="1200"/>
+              <a:t>Step 7: The guardian can open the app, see the driver's location on a map, and respond.</a:t>
+            </a:r>
+          </a:p>
+          <a:p>
+            <a:r>
+              <a:rPr lang="en-US" dirty="0" sz="1200"/>
+              <a:t>Say: 'This is the closed-loop feature that makes SnoozeGuard different from other apps — it does not just alert the driver, it also alerts someone who can help.'</a:t>
+            </a:r>
+          </a:p>
+        </p:txBody>
+      </p:sp>
+      <p:sp>
+        <p:nvSpPr>
+          <p:cNvPr id="4" name="Slide Number Placeholder 3"/>
+          <p:cNvSpPr>
+            <a:spLocks noGrp="1"/>
+          </p:cNvSpPr>
+          <p:nvPr>
+            <p:ph type="sldNum" sz="quarter" idx="10"/>
+          </p:nvPr>
+        </p:nvSpPr>
+        <p:spPr/>
+        <p:txBody>
+          <a:bodyPr/>
+          <a:lstStyle/>
+          <a:p>
+            <a:fld id="{F7021451-1387-4CA6-816F-3879F97B5CBC}" type="slidenum">
+              <a:rPr lang="en-US"/>
+              <a:t>11</a:t>
+            </a:fld>
+            <a:endParaRPr lang="en-US"/>
+          </a:p>
+        </p:txBody>
+      </p:sp>
+    </p:spTree>
+    <p:extLst>
+      <p:ext uri="{BB962C8B-B14F-4D97-AF65-F5344CB8AC3E}">
+        <p14:creationId xmlns:p14="http://schemas.microsoft.com/office/powerpoint/2010/main" val="1024086991"/>
+      </p:ext>
+    </p:extLst>
+  </p:cSld>
+  <p:clrMapOvr>
+    <a:masterClrMapping/>
+  </p:clrMapOvr>
+</p:notes>
+</file>
+
+<file path=ppt\notesSlides\notesSlide12.xml><?xml version="1.0" encoding="utf-8"?>
+<p:notes xmlns:a="http://schemas.openxmlformats.org/drawingml/2006/main" xmlns:r="http://schemas.openxmlformats.org/officeDocument/2006/relationships" xmlns:p="http://schemas.openxmlformats.org/presentationml/2006/main">
+  <p:cSld>
+    <p:spTree>
+      <p:nvGrpSpPr>
+        <p:cNvPr id="1" name=""/>
+        <p:cNvGrpSpPr/>
+        <p:nvPr/>
+      </p:nvGrpSpPr>
+      <p:grpSpPr>
+        <a:xfrm>
+          <a:off x="0" y="0"/>
+          <a:ext cx="0" cy="0"/>
+          <a:chOff x="0" y="0"/>
+          <a:chExt cx="0" cy="0"/>
+        </a:xfrm>
+      </p:grpSpPr>
+      <p:sp>
+        <p:nvSpPr>
+          <p:cNvPr id="2" name="Slide Image Placeholder 1"/>
+          <p:cNvSpPr>
+            <a:spLocks noGrp="1" noRot="1" noChangeAspect="1"/>
+          </p:cNvSpPr>
+          <p:nvPr>
+            <p:ph type="sldImg"/>
+          </p:nvPr>
+        </p:nvSpPr>
+        <p:spPr/>
+      </p:sp>
+      <p:sp>
+        <p:nvSpPr>
+          <p:cNvPr id="3" name="Notes Placeholder 2"/>
+          <p:cNvSpPr>
+            <a:spLocks noGrp="1"/>
+          </p:cNvSpPr>
+          <p:nvPr>
+            <p:ph type="body" idx="1"/>
+          </p:nvPr>
+        </p:nvSpPr>
+        <p:spPr/>
+        <p:txBody>
+          <a:bodyPr/>
+          <a:lstStyle/>
+          <a:p>
+            <a:r>
+              <a:rPr lang="en-US" dirty="0" sz="1200"/>
+              <a:t>This slide explains how the app keeps working even without internet — which is important in the Philippines where signal is not always reliable.</a:t>
+            </a:r>
+          </a:p>
+          <a:p>
+            <a:r>
+              <a:rPr lang="en-US" dirty="0" sz="1200"/>
+              <a:t>Say: 'All session data is saved directly to the phone's local storage first — we call this SQLite. This happens instantly, no internet needed.'</a:t>
+            </a:r>
+          </a:p>
+          <a:p>
+            <a:r>
+              <a:rPr lang="en-US" dirty="0" sz="1200"/>
+              <a:t>'When the phone gets internet back, the app automatically syncs everything to the cloud in the background. The user does not have to do anything.'</a:t>
+            </a:r>
+          </a:p>
+          <a:p>
+            <a:r>
+              <a:rPr lang="en-US" dirty="0" sz="1200"/>
+              <a:t>Point to the auth fallback: 'Even login works offline. If the app cannot reach the server, it reads the saved login from local storage — so the driver can still start a session.'</a:t>
+            </a:r>
+          </a:p>
+          <a:p>
+            <a:r>
+              <a:rPr lang="en-US" dirty="0" sz="1200"/>
+              <a:t>This is important for the panel — it shows the system was designed for real-world conditions, not just ideal internet environments.</a:t>
+            </a:r>
+          </a:p>
+        </p:txBody>
+      </p:sp>
+      <p:sp>
+        <p:nvSpPr>
+          <p:cNvPr id="4" name="Slide Number Placeholder 3"/>
+          <p:cNvSpPr>
+            <a:spLocks noGrp="1"/>
+          </p:cNvSpPr>
+          <p:nvPr>
+            <p:ph type="sldNum" sz="quarter" idx="10"/>
+          </p:nvPr>
+        </p:nvSpPr>
+        <p:spPr/>
+        <p:txBody>
+          <a:bodyPr/>
+          <a:lstStyle/>
+          <a:p>
+            <a:fld id="{F7021451-1387-4CA6-816F-3879F97B5CBC}" type="slidenum">
+              <a:rPr lang="en-US"/>
+              <a:t>12</a:t>
+            </a:fld>
+            <a:endParaRPr lang="en-US"/>
+          </a:p>
+        </p:txBody>
+      </p:sp>
+    </p:spTree>
+    <p:extLst>
+      <p:ext uri="{BB962C8B-B14F-4D97-AF65-F5344CB8AC3E}">
+        <p14:creationId xmlns:p14="http://schemas.microsoft.com/office/powerpoint/2010/main" val="1024086991"/>
+      </p:ext>
+    </p:extLst>
+  </p:cSld>
+  <p:clrMapOvr>
+    <a:masterClrMapping/>
+  </p:clrMapOvr>
+</p:notes>
+</file>
+
+<file path=ppt\notesSlides\notesSlide13.xml><?xml version="1.0" encoding="utf-8"?>
+<p:notes xmlns:a="http://schemas.openxmlformats.org/drawingml/2006/main" xmlns:r="http://schemas.openxmlformats.org/officeDocument/2006/relationships" xmlns:p="http://schemas.openxmlformats.org/presentationml/2006/main">
+  <p:cSld>
+    <p:spTree>
+      <p:nvGrpSpPr>
+        <p:cNvPr id="1" name=""/>
+        <p:cNvGrpSpPr/>
+        <p:nvPr/>
+      </p:nvGrpSpPr>
+      <p:grpSpPr>
+        <a:xfrm>
+          <a:off x="0" y="0"/>
+          <a:ext cx="0" cy="0"/>
+          <a:chOff x="0" y="0"/>
+          <a:chExt cx="0" cy="0"/>
+        </a:xfrm>
+      </p:grpSpPr>
+      <p:sp>
+        <p:nvSpPr>
+          <p:cNvPr id="2" name="Slide Image Placeholder 1"/>
+          <p:cNvSpPr>
+            <a:spLocks noGrp="1" noRot="1" noChangeAspect="1"/>
+          </p:cNvSpPr>
+          <p:nvPr>
+            <p:ph type="sldImg"/>
+          </p:nvPr>
+        </p:nvSpPr>
+        <p:spPr/>
+      </p:sp>
+      <p:sp>
+        <p:nvSpPr>
+          <p:cNvPr id="3" name="Notes Placeholder 2"/>
+          <p:cNvSpPr>
+            <a:spLocks noGrp="1"/>
+          </p:cNvSpPr>
+          <p:nvPr>
+            <p:ph type="body" idx="1"/>
+          </p:nvPr>
+        </p:nvSpPr>
+        <p:spPr/>
+        <p:txBody>
+          <a:bodyPr/>
+          <a:lstStyle/>
+          <a:p>
+            <a:r>
+              <a:rPr lang="en-US" dirty="0" sz="1200"/>
+              <a:t>This slide explains how the system was built and how it was evaluated.</a:t>
+            </a:r>
+          </a:p>
+          <a:p>
+            <a:r>
+              <a:rPr lang="en-US" dirty="0" sz="1200"/>
+              <a:t>Say: 'We used an Iterative SDLC approach — which means we built the system step by step, testing each part before moving to the next. We had 8 phases from January to April 2025.'</a:t>
+            </a:r>
+          </a:p>
+          <a:p>
+            <a:r>
+              <a:rPr lang="en-US" dirty="0" sz="1200"/>
+              <a:t>Walk through the phases briefly: 'Phase 1 was planning, Phase 2 and 3 were building the mobile app, Phase 4 was the web dashboard, Phase 5 was the IoT firmware, Phase 6 was integration testing, Phase 7 was the survey with respondents, and Phase 8 was documentation.'</a:t>
+            </a:r>
+          </a:p>
+          <a:p>
+            <a:r>
+              <a:rPr lang="en-US" dirty="0" sz="1200"/>
+              <a:t>For the evaluation: 'We used ISO/IEC 25010 — an international standard for measuring software quality. It has 8 categories. We gave a 66-item questionnaire to 29 respondents.'</a:t>
+            </a:r>
+          </a:p>
+          <a:p>
+            <a:r>
+              <a:rPr lang="en-US" dirty="0" sz="1200"/>
+              <a:t>Say: 'Respondents were active drivers who evaluated the system using our physical driving simulator.'</a:t>
+            </a:r>
+          </a:p>
+        </p:txBody>
+      </p:sp>
+      <p:sp>
+        <p:nvSpPr>
+          <p:cNvPr id="4" name="Slide Number Placeholder 3"/>
+          <p:cNvSpPr>
+            <a:spLocks noGrp="1"/>
+          </p:cNvSpPr>
+          <p:nvPr>
+            <p:ph type="sldNum" sz="quarter" idx="10"/>
+          </p:nvPr>
+        </p:nvSpPr>
+        <p:spPr/>
+        <p:txBody>
+          <a:bodyPr/>
+          <a:lstStyle/>
+          <a:p>
+            <a:fld id="{F7021451-1387-4CA6-816F-3879F97B5CBC}" type="slidenum">
+              <a:rPr lang="en-US"/>
+              <a:t>13</a:t>
+            </a:fld>
+            <a:endParaRPr lang="en-US"/>
+          </a:p>
+        </p:txBody>
+      </p:sp>
+    </p:spTree>
+    <p:extLst>
+      <p:ext uri="{BB962C8B-B14F-4D97-AF65-F5344CB8AC3E}">
+        <p14:creationId xmlns:p14="http://schemas.microsoft.com/office/powerpoint/2010/main" val="1024086991"/>
+      </p:ext>
+    </p:extLst>
+  </p:cSld>
+  <p:clrMapOvr>
+    <a:masterClrMapping/>
+  </p:clrMapOvr>
+</p:notes>
+</file>
+
+<file path=ppt\notesSlides\notesSlide14.xml><?xml version="1.0" encoding="utf-8"?>
+<p:notes xmlns:a="http://schemas.openxmlformats.org/drawingml/2006/main" xmlns:r="http://schemas.openxmlformats.org/officeDocument/2006/relationships" xmlns:p="http://schemas.openxmlformats.org/presentationml/2006/main">
+  <p:cSld>
+    <p:spTree>
+      <p:nvGrpSpPr>
+        <p:cNvPr id="1" name=""/>
+        <p:cNvGrpSpPr/>
+        <p:nvPr/>
+      </p:nvGrpSpPr>
+      <p:grpSpPr>
+        <a:xfrm>
+          <a:off x="0" y="0"/>
+          <a:ext cx="0" cy="0"/>
+          <a:chOff x="0" y="0"/>
+          <a:chExt cx="0" cy="0"/>
+        </a:xfrm>
+      </p:grpSpPr>
+      <p:sp>
+        <p:nvSpPr>
+          <p:cNvPr id="2" name="Slide Image Placeholder 1"/>
+          <p:cNvSpPr>
+            <a:spLocks noGrp="1" noRot="1" noChangeAspect="1"/>
+          </p:cNvSpPr>
+          <p:nvPr>
+            <p:ph type="sldImg"/>
+          </p:nvPr>
+        </p:nvSpPr>
+        <p:spPr/>
+      </p:sp>
+      <p:sp>
+        <p:nvSpPr>
+          <p:cNvPr id="3" name="Notes Placeholder 2"/>
+          <p:cNvSpPr>
+            <a:spLocks noGrp="1"/>
+          </p:cNvSpPr>
+          <p:nvPr>
+            <p:ph type="body" idx="1"/>
+          </p:nvPr>
+        </p:nvSpPr>
+        <p:spPr/>
+        <p:txBody>
+          <a:bodyPr/>
+          <a:lstStyle/>
+          <a:p>
+            <a:r>
+              <a:rPr lang="en-US" dirty="0" sz="1200"/>
+              <a:t>This slide shows the driving simulator the team built.</a:t>
+            </a:r>
+          </a:p>
+          <a:p>
+            <a:r>
+              <a:rPr lang="en-US" dirty="0" sz="1200"/>
+              <a:t>Say: 'Because we could not use a real road for testing, we built our own driving simulator. It uses a real car seat, a Logitech steering wheel with force feedback, actual pedals, and a phone mount in front of the driver's face.'</a:t>
+            </a:r>
+          </a:p>
+          <a:p>
+            <a:r>
+              <a:rPr lang="en-US" dirty="0" sz="1200"/>
+              <a:t>'Every respondent sat in this simulator, used the system, and then answered the questionnaire. This made sure their ratings were based on real experience, not just guessing.'</a:t>
+            </a:r>
+          </a:p>
+          <a:p>
+            <a:r>
+              <a:rPr lang="en-US" dirty="0" sz="1200"/>
+              <a:t>You can mention: 'The phone mount is positioned 60 to 80 centimeters from the driver's face — the same distance as in a real car. This made sure MediaPipe could detect the face properly.'</a:t>
+            </a:r>
+          </a:p>
+          <a:p>
+            <a:r>
+              <a:rPr lang="en-US" dirty="0" sz="1200"/>
+              <a:t>If the panel asks why you built this instead of testing in a real car, say: 'Safety and control — we needed a consistent, controlled environment for all 29 respondents.'</a:t>
+            </a:r>
+          </a:p>
+        </p:txBody>
+      </p:sp>
+      <p:sp>
+        <p:nvSpPr>
+          <p:cNvPr id="4" name="Slide Number Placeholder 3"/>
+          <p:cNvSpPr>
+            <a:spLocks noGrp="1"/>
+          </p:cNvSpPr>
+          <p:nvPr>
+            <p:ph type="sldNum" sz="quarter" idx="10"/>
+          </p:nvPr>
+        </p:nvSpPr>
+        <p:spPr/>
+        <p:txBody>
+          <a:bodyPr/>
+          <a:lstStyle/>
+          <a:p>
+            <a:fld id="{F7021451-1387-4CA6-816F-3879F97B5CBC}" type="slidenum">
+              <a:rPr lang="en-US"/>
+              <a:t>14</a:t>
+            </a:fld>
+            <a:endParaRPr lang="en-US"/>
+          </a:p>
+        </p:txBody>
+      </p:sp>
+    </p:spTree>
+    <p:extLst>
+      <p:ext uri="{BB962C8B-B14F-4D97-AF65-F5344CB8AC3E}">
+        <p14:creationId xmlns:p14="http://schemas.microsoft.com/office/powerpoint/2010/main" val="1024086991"/>
+      </p:ext>
+    </p:extLst>
+  </p:cSld>
+  <p:clrMapOvr>
+    <a:masterClrMapping/>
+  </p:clrMapOvr>
+</p:notes>
+</file>
+
+<file path=ppt\notesSlides\notesSlide15.xml><?xml version="1.0" encoding="utf-8"?>
+<p:notes xmlns:a="http://schemas.openxmlformats.org/drawingml/2006/main" xmlns:r="http://schemas.openxmlformats.org/officeDocument/2006/relationships" xmlns:p="http://schemas.openxmlformats.org/presentationml/2006/main">
+  <p:cSld>
+    <p:spTree>
+      <p:nvGrpSpPr>
+        <p:cNvPr id="1" name=""/>
+        <p:cNvGrpSpPr/>
+        <p:nvPr/>
+      </p:nvGrpSpPr>
+      <p:grpSpPr>
+        <a:xfrm>
+          <a:off x="0" y="0"/>
+          <a:ext cx="0" cy="0"/>
+          <a:chOff x="0" y="0"/>
+          <a:chExt cx="0" cy="0"/>
+        </a:xfrm>
+      </p:grpSpPr>
+      <p:sp>
+        <p:nvSpPr>
+          <p:cNvPr id="2" name="Slide Image Placeholder 1"/>
+          <p:cNvSpPr>
+            <a:spLocks noGrp="1" noRot="1" noChangeAspect="1"/>
+          </p:cNvSpPr>
+          <p:nvPr>
+            <p:ph type="sldImg"/>
+          </p:nvPr>
+        </p:nvSpPr>
+        <p:spPr/>
+      </p:sp>
+      <p:sp>
+        <p:nvSpPr>
+          <p:cNvPr id="3" name="Notes Placeholder 2"/>
+          <p:cNvSpPr>
+            <a:spLocks noGrp="1"/>
+          </p:cNvSpPr>
+          <p:nvPr>
+            <p:ph type="body" idx="1"/>
+          </p:nvPr>
+        </p:nvSpPr>
+        <p:spPr/>
+        <p:txBody>
+          <a:bodyPr/>
+          <a:lstStyle/>
+          <a:p>
+            <a:r>
+              <a:rPr lang="en-US" dirty="0" sz="1200"/>
+              <a:t>This is the main results table. Walk through it clearly.</a:t>
+            </a:r>
+          </a:p>
+          <a:p>
+            <a:r>
+              <a:rPr lang="en-US" dirty="0" sz="1200"/>
+              <a:t>Say: 'We evaluated SnoozeGuard across all 8 quality characteristics of ISO/IEC 25010. All 8 got a Very Satisfactory rating.'</a:t>
+            </a:r>
+          </a:p>
+          <a:p>
+            <a:r>
+              <a:rPr lang="en-US" dirty="0" sz="1200"/>
+              <a:t>Highlight the top scores: 'The highest score was Performance Efficiency at 4.11 — meaning the system responds quickly and smoothly. Portability also scored well at 4.07, meaning it works across different Android phones and browsers.'</a:t>
+            </a:r>
+          </a:p>
+          <a:p>
+            <a:r>
+              <a:rPr lang="en-US" dirty="0" sz="1200"/>
+              <a:t>For the lower scores: 'Usability scored 3.90 and Reliability 3.91 — still Very Satisfactory, but these are areas we can improve. Some respondents found the drowsiness level display a bit hard to read at a glance, and face detection can be affected by lighting conditions.'</a:t>
+            </a:r>
+          </a:p>
+          <a:p>
+            <a:r>
+              <a:rPr lang="en-US" dirty="0" sz="1200"/>
+              <a:t>End with: 'The Grand Mean is 4.01 — Very Satisfactory. This means the system met the quality standards expected of a working prototype.'</a:t>
+            </a:r>
+          </a:p>
+        </p:txBody>
+      </p:sp>
+      <p:sp>
+        <p:nvSpPr>
+          <p:cNvPr id="4" name="Slide Number Placeholder 3"/>
+          <p:cNvSpPr>
+            <a:spLocks noGrp="1"/>
+          </p:cNvSpPr>
+          <p:nvPr>
+            <p:ph type="sldNum" sz="quarter" idx="10"/>
+          </p:nvPr>
+        </p:nvSpPr>
+        <p:spPr/>
+        <p:txBody>
+          <a:bodyPr/>
+          <a:lstStyle/>
+          <a:p>
+            <a:fld id="{F7021451-1387-4CA6-816F-3879F97B5CBC}" type="slidenum">
+              <a:rPr lang="en-US"/>
+              <a:t>15</a:t>
+            </a:fld>
+            <a:endParaRPr lang="en-US"/>
+          </a:p>
+        </p:txBody>
+      </p:sp>
+    </p:spTree>
+    <p:extLst>
+      <p:ext uri="{BB962C8B-B14F-4D97-AF65-F5344CB8AC3E}">
+        <p14:creationId xmlns:p14="http://schemas.microsoft.com/office/powerpoint/2010/main" val="1024086991"/>
+      </p:ext>
+    </p:extLst>
+  </p:cSld>
+  <p:clrMapOvr>
+    <a:masterClrMapping/>
+  </p:clrMapOvr>
+</p:notes>
+</file>
+
+<file path=ppt\notesSlides\notesSlide16.xml><?xml version="1.0" encoding="utf-8"?>
+<p:notes xmlns:a="http://schemas.openxmlformats.org/drawingml/2006/main" xmlns:r="http://schemas.openxmlformats.org/officeDocument/2006/relationships" xmlns:p="http://schemas.openxmlformats.org/presentationml/2006/main">
+  <p:cSld>
+    <p:spTree>
+      <p:nvGrpSpPr>
+        <p:cNvPr id="1" name=""/>
+        <p:cNvGrpSpPr/>
+        <p:nvPr/>
+      </p:nvGrpSpPr>
+      <p:grpSpPr>
+        <a:xfrm>
+          <a:off x="0" y="0"/>
+          <a:ext cx="0" cy="0"/>
+          <a:chOff x="0" y="0"/>
+          <a:chExt cx="0" cy="0"/>
+        </a:xfrm>
+      </p:grpSpPr>
+      <p:sp>
+        <p:nvSpPr>
+          <p:cNvPr id="2" name="Slide Image Placeholder 1"/>
+          <p:cNvSpPr>
+            <a:spLocks noGrp="1" noRot="1" noChangeAspect="1"/>
+          </p:cNvSpPr>
+          <p:nvPr>
+            <p:ph type="sldImg"/>
+          </p:nvPr>
+        </p:nvSpPr>
+        <p:spPr/>
+      </p:sp>
+      <p:sp>
+        <p:nvSpPr>
+          <p:cNvPr id="3" name="Notes Placeholder 2"/>
+          <p:cNvSpPr>
+            <a:spLocks noGrp="1"/>
+          </p:cNvSpPr>
+          <p:nvPr>
+            <p:ph type="body" idx="1"/>
+          </p:nvPr>
+        </p:nvSpPr>
+        <p:spPr/>
+        <p:txBody>
+          <a:bodyPr/>
+          <a:lstStyle/>
+          <a:p>
+            <a:r>
+              <a:rPr lang="en-US" dirty="0" sz="1200"/>
+              <a:t>These are your six main conclusions. Speak confidently — these are the answers to your five research questions.</a:t>
+            </a:r>
+          </a:p>
+          <a:p>
+            <a:r>
+              <a:rPr lang="en-US" dirty="0" sz="1200"/>
+              <a:t>Conclusion 1 answers question 1: Yes, a smartphone camera can reliably detect drowsiness using multiple signals.</a:t>
+            </a:r>
+          </a:p>
+          <a:p>
+            <a:r>
+              <a:rPr lang="en-US" dirty="0" sz="1200"/>
+              <a:t>Conclusion 2 answers question 2: The 10-level model gives proportional alerts that avoid over-alarming the driver.</a:t>
+            </a:r>
+          </a:p>
+          <a:p>
+            <a:r>
+              <a:rPr lang="en-US" dirty="0" sz="1200"/>
+              <a:t>Conclusion 3 answers question 3: The ESP32 IoT device works — it extends alerts beyond the phone screen using both WiFi and Bluetooth.</a:t>
+            </a:r>
+          </a:p>
+          <a:p>
+            <a:r>
+              <a:rPr lang="en-US" dirty="0" sz="1200"/>
+              <a:t>Conclusion 4 answers question 4: The emergency pipeline works — push notification and SMS reach the guardian when the driver is unresponsive.</a:t>
+            </a:r>
+          </a:p>
+          <a:p>
+            <a:r>
+              <a:rPr lang="en-US" dirty="0" sz="1200"/>
+              <a:t>Conclusion 5 is about offline mode — SQLite ensures the app works even in areas with no signal.</a:t>
+            </a:r>
+          </a:p>
+          <a:p>
+            <a:r>
+              <a:rPr lang="en-US" dirty="0" sz="1200"/>
+              <a:t>Conclusion 6 answers question 5: Grand Mean 4.01, Very Satisfactory — the system meets software quality requirements.</a:t>
+            </a:r>
+          </a:p>
+          <a:p>
+            <a:r>
+              <a:rPr lang="en-US" dirty="0" sz="1200"/>
+              <a:t>Speak slowly and clearly here. The panel will be listening carefully to your conclusions.</a:t>
+            </a:r>
+          </a:p>
+        </p:txBody>
+      </p:sp>
+      <p:sp>
+        <p:nvSpPr>
+          <p:cNvPr id="4" name="Slide Number Placeholder 3"/>
+          <p:cNvSpPr>
+            <a:spLocks noGrp="1"/>
+          </p:cNvSpPr>
+          <p:nvPr>
+            <p:ph type="sldNum" sz="quarter" idx="10"/>
+          </p:nvPr>
+        </p:nvSpPr>
+        <p:spPr/>
+        <p:txBody>
+          <a:bodyPr/>
+          <a:lstStyle/>
+          <a:p>
+            <a:fld id="{F7021451-1387-4CA6-816F-3879F97B5CBC}" type="slidenum">
+              <a:rPr lang="en-US"/>
+              <a:t>16</a:t>
+            </a:fld>
+            <a:endParaRPr lang="en-US"/>
+          </a:p>
+        </p:txBody>
+      </p:sp>
+    </p:spTree>
+    <p:extLst>
+      <p:ext uri="{BB962C8B-B14F-4D97-AF65-F5344CB8AC3E}">
+        <p14:creationId xmlns:p14="http://schemas.microsoft.com/office/powerpoint/2010/main" val="1024086991"/>
+      </p:ext>
+    </p:extLst>
+  </p:cSld>
+  <p:clrMapOvr>
+    <a:masterClrMapping/>
+  </p:clrMapOvr>
+</p:notes>
+</file>
+
+<file path=ppt\notesSlides\notesSlide17.xml><?xml version="1.0" encoding="utf-8"?>
+<p:notes xmlns:a="http://schemas.openxmlformats.org/drawingml/2006/main" xmlns:r="http://schemas.openxmlformats.org/officeDocument/2006/relationships" xmlns:p="http://schemas.openxmlformats.org/presentationml/2006/main">
+  <p:cSld>
+    <p:spTree>
+      <p:nvGrpSpPr>
+        <p:cNvPr id="1" name=""/>
+        <p:cNvGrpSpPr/>
+        <p:nvPr/>
+      </p:nvGrpSpPr>
+      <p:grpSpPr>
+        <a:xfrm>
+          <a:off x="0" y="0"/>
+          <a:ext cx="0" cy="0"/>
+          <a:chOff x="0" y="0"/>
+          <a:chExt cx="0" cy="0"/>
+        </a:xfrm>
+      </p:grpSpPr>
+      <p:sp>
+        <p:nvSpPr>
+          <p:cNvPr id="2" name="Slide Image Placeholder 1"/>
+          <p:cNvSpPr>
+            <a:spLocks noGrp="1" noRot="1" noChangeAspect="1"/>
+          </p:cNvSpPr>
+          <p:nvPr>
+            <p:ph type="sldImg"/>
+          </p:nvPr>
+        </p:nvSpPr>
+        <p:spPr/>
+      </p:sp>
+      <p:sp>
+        <p:nvSpPr>
+          <p:cNvPr id="3" name="Notes Placeholder 2"/>
+          <p:cNvSpPr>
+            <a:spLocks noGrp="1"/>
+          </p:cNvSpPr>
+          <p:nvPr>
+            <p:ph type="body" idx="1"/>
+          </p:nvPr>
+        </p:nvSpPr>
+        <p:spPr/>
+        <p:txBody>
+          <a:bodyPr/>
+          <a:lstStyle/>
+          <a:p>
+            <a:r>
+              <a:rPr lang="en-US" dirty="0" sz="1200"/>
+              <a:t>These are suggestions for future researchers or for the next version of SnoozeGuard.</a:t>
+            </a:r>
+          </a:p>
+          <a:p>
+            <a:r>
+              <a:rPr lang="en-US" dirty="0" sz="1200"/>
+              <a:t>You do not need to go into deep detail here. Briefly mention each one:</a:t>
+            </a:r>
+          </a:p>
+          <a:p>
+            <a:r>
+              <a:rPr lang="en-US" dirty="0" sz="1200"/>
+              <a:t>Field Validation — test the system in real driving conditions, not just the simulator.</a:t>
+            </a:r>
+          </a:p>
+          <a:p>
+            <a:r>
+              <a:rPr lang="en-US" dirty="0" sz="1200"/>
+              <a:t>Eye Closure — add PERCLOS eye tracking as an extra signal for better accuracy.</a:t>
+            </a:r>
+          </a:p>
+          <a:p>
+            <a:r>
+              <a:rPr lang="en-US" dirty="0" sz="1200"/>
+              <a:t>OBD-II — connect to the car's computer for speed and lane data.</a:t>
+            </a:r>
+          </a:p>
+          <a:p>
+            <a:r>
+              <a:rPr lang="en-US" dirty="0" sz="1200"/>
+              <a:t>Certification — get the system certified as a proper safety tool.</a:t>
+            </a:r>
+          </a:p>
+          <a:p>
+            <a:r>
+              <a:rPr lang="en-US" dirty="0" sz="1200"/>
+              <a:t>Multi-Language — add Filipino language alerts and interface.</a:t>
+            </a:r>
+          </a:p>
+          <a:p>
+            <a:r>
+              <a:rPr lang="en-US" dirty="0" sz="1200"/>
+              <a:t>Fleet Dashboard — let companies monitor multiple drivers at once.</a:t>
+            </a:r>
+          </a:p>
+          <a:p>
+            <a:r>
+              <a:rPr lang="en-US" dirty="0" sz="1200"/>
+              <a:t>Battery Optimization — reduce phone battery drain during long sessions.</a:t>
+            </a:r>
+          </a:p>
+          <a:p>
+            <a:r>
+              <a:rPr lang="en-US" dirty="0" sz="1200"/>
+              <a:t>Say: 'These are areas we would like to see improved in future work.'</a:t>
+            </a:r>
+          </a:p>
+        </p:txBody>
+      </p:sp>
+      <p:sp>
+        <p:nvSpPr>
+          <p:cNvPr id="4" name="Slide Number Placeholder 3"/>
+          <p:cNvSpPr>
+            <a:spLocks noGrp="1"/>
+          </p:cNvSpPr>
+          <p:nvPr>
+            <p:ph type="sldNum" sz="quarter" idx="10"/>
+          </p:nvPr>
+        </p:nvSpPr>
+        <p:spPr/>
+        <p:txBody>
+          <a:bodyPr/>
+          <a:lstStyle/>
+          <a:p>
+            <a:fld id="{F7021451-1387-4CA6-816F-3879F97B5CBC}" type="slidenum">
+              <a:rPr lang="en-US"/>
+              <a:t>17</a:t>
+            </a:fld>
+            <a:endParaRPr lang="en-US"/>
+          </a:p>
+        </p:txBody>
+      </p:sp>
+    </p:spTree>
+    <p:extLst>
+      <p:ext uri="{BB962C8B-B14F-4D97-AF65-F5344CB8AC3E}">
+        <p14:creationId xmlns:p14="http://schemas.microsoft.com/office/powerpoint/2010/main" val="1024086991"/>
+      </p:ext>
+    </p:extLst>
+  </p:cSld>
+  <p:clrMapOvr>
+    <a:masterClrMapping/>
+  </p:clrMapOvr>
+</p:notes>
+</file>
+
+<file path=ppt\notesSlides\notesSlide18.xml><?xml version="1.0" encoding="utf-8"?>
+<p:notes xmlns:a="http://schemas.openxmlformats.org/drawingml/2006/main" xmlns:r="http://schemas.openxmlformats.org/officeDocument/2006/relationships" xmlns:p="http://schemas.openxmlformats.org/presentationml/2006/main">
+  <p:cSld>
+    <p:spTree>
+      <p:nvGrpSpPr>
+        <p:cNvPr id="1" name=""/>
+        <p:cNvGrpSpPr/>
+        <p:nvPr/>
+      </p:nvGrpSpPr>
+      <p:grpSpPr>
+        <a:xfrm>
+          <a:off x="0" y="0"/>
+          <a:ext cx="0" cy="0"/>
+          <a:chOff x="0" y="0"/>
+          <a:chExt cx="0" cy="0"/>
+        </a:xfrm>
+      </p:grpSpPr>
+      <p:sp>
+        <p:nvSpPr>
+          <p:cNvPr id="2" name="Slide Image Placeholder 1"/>
+          <p:cNvSpPr>
+            <a:spLocks noGrp="1" noRot="1" noChangeAspect="1"/>
+          </p:cNvSpPr>
+          <p:nvPr>
+            <p:ph type="sldImg"/>
+          </p:nvPr>
+        </p:nvSpPr>
+        <p:spPr/>
+      </p:sp>
+      <p:sp>
+        <p:nvSpPr>
+          <p:cNvPr id="3" name="Notes Placeholder 2"/>
+          <p:cNvSpPr>
+            <a:spLocks noGrp="1"/>
+          </p:cNvSpPr>
+          <p:nvPr>
+            <p:ph type="body" idx="1"/>
+          </p:nvPr>
+        </p:nvSpPr>
+        <p:spPr/>
+        <p:txBody>
+          <a:bodyPr/>
+          <a:lstStyle/>
+          <a:p>
+            <a:r>
+              <a:rPr lang="en-US" dirty="0" sz="1200"/>
+              <a:t>Thank the panel and audience for their time.</a:t>
+            </a:r>
+          </a:p>
+          <a:p>
+            <a:r>
+              <a:rPr lang="en-US" dirty="0" sz="1200"/>
+              <a:t>Say: 'Thank you for listening. We are now open for any questions or clarifications.'</a:t>
+            </a:r>
+          </a:p>
+          <a:p>
+            <a:r>
+              <a:rPr lang="en-US" dirty="0" sz="1200"/>
+              <a:t>Remind your teammates to be ready for their parts of the Q&amp;A:</a:t>
+            </a:r>
+          </a:p>
+          <a:p>
+            <a:r>
+              <a:rPr lang="en-US" dirty="0" sz="1200"/>
+              <a:t>- Agno: Ready to answer questions about the detection algorithm and IoT firmware.</a:t>
+            </a:r>
+          </a:p>
+          <a:p>
+            <a:r>
+              <a:rPr lang="en-US" dirty="0" sz="1200"/>
+              <a:t>- Pilor: Ready to answer questions about the mobile app, emergency system, and evaluation results.</a:t>
+            </a:r>
+          </a:p>
+          <a:p>
+            <a:r>
+              <a:rPr lang="en-US" dirty="0" sz="1200"/>
+              <a:t>- Ylagan: Ready to answer questions about the system architecture, web dashboard, and cloud backend.</a:t>
+            </a:r>
+          </a:p>
+          <a:p>
+            <a:r>
+              <a:rPr lang="en-US" dirty="0" sz="1200"/>
+              <a:t>Stay calm during Q&amp;A. If you are not sure about an answer, it is okay to say 'We will look into that further' or ask your teammates.</a:t>
+            </a:r>
+          </a:p>
+          <a:p>
+            <a:r>
+              <a:rPr lang="en-US" dirty="0" sz="1200"/>
+              <a:t>If the panel asks about a specific slide, go back to it — do not try to answer everything from memory.</a:t>
+            </a:r>
+          </a:p>
+        </p:txBody>
+      </p:sp>
+      <p:sp>
+        <p:nvSpPr>
+          <p:cNvPr id="4" name="Slide Number Placeholder 3"/>
+          <p:cNvSpPr>
+            <a:spLocks noGrp="1"/>
+          </p:cNvSpPr>
+          <p:nvPr>
+            <p:ph type="sldNum" sz="quarter" idx="10"/>
+          </p:nvPr>
+        </p:nvSpPr>
+        <p:spPr/>
+        <p:txBody>
+          <a:bodyPr/>
+          <a:lstStyle/>
+          <a:p>
+            <a:fld id="{F7021451-1387-4CA6-816F-3879F97B5CBC}" type="slidenum">
+              <a:rPr lang="en-US"/>
+              <a:t>18</a:t>
+            </a:fld>
+            <a:endParaRPr lang="en-US"/>
+          </a:p>
+        </p:txBody>
+      </p:sp>
+    </p:spTree>
+    <p:extLst>
+      <p:ext uri="{BB962C8B-B14F-4D97-AF65-F5344CB8AC3E}">
+        <p14:creationId xmlns:p14="http://schemas.microsoft.com/office/powerpoint/2010/main" val="1024086991"/>
+      </p:ext>
+    </p:extLst>
+  </p:cSld>
+  <p:clrMapOvr>
+    <a:masterClrMapping/>
+  </p:clrMapOvr>
+</p:notes>
+</file>
+
+<file path=ppt\notesSlides\notesSlide2.xml><?xml version="1.0" encoding="utf-8"?>
+<p:notes xmlns:a="http://schemas.openxmlformats.org/drawingml/2006/main" xmlns:r="http://schemas.openxmlformats.org/officeDocument/2006/relationships" xmlns:p="http://schemas.openxmlformats.org/presentationml/2006/main">
+  <p:cSld>
+    <p:spTree>
+      <p:nvGrpSpPr>
+        <p:cNvPr id="1" name=""/>
+        <p:cNvGrpSpPr/>
+        <p:nvPr/>
+      </p:nvGrpSpPr>
+      <p:grpSpPr>
+        <a:xfrm>
+          <a:off x="0" y="0"/>
+          <a:ext cx="0" cy="0"/>
+          <a:chOff x="0" y="0"/>
+          <a:chExt cx="0" cy="0"/>
+        </a:xfrm>
+      </p:grpSpPr>
+      <p:sp>
+        <p:nvSpPr>
+          <p:cNvPr id="2" name="Slide Image Placeholder 1"/>
+          <p:cNvSpPr>
+            <a:spLocks noGrp="1" noRot="1" noChangeAspect="1"/>
+          </p:cNvSpPr>
+          <p:nvPr>
+            <p:ph type="sldImg"/>
+          </p:nvPr>
+        </p:nvSpPr>
+        <p:spPr/>
+      </p:sp>
+      <p:sp>
+        <p:nvSpPr>
+          <p:cNvPr id="3" name="Notes Placeholder 2"/>
+          <p:cNvSpPr>
+            <a:spLocks noGrp="1"/>
+          </p:cNvSpPr>
+          <p:nvPr>
+            <p:ph type="body" idx="1"/>
+          </p:nvPr>
+        </p:nvSpPr>
+        <p:spPr/>
+        <p:txBody>
+          <a:bodyPr/>
+          <a:lstStyle/>
+          <a:p>
+            <a:r>
+              <a:rPr lang="en-US" dirty="0" sz="1200"/>
+              <a:t>This is your road map. Briefly tell the panel what you will cover.</a:t>
+            </a:r>
+          </a:p>
+          <a:p>
+            <a:r>
+              <a:rPr lang="en-US" dirty="0" sz="1200"/>
+              <a:t>Say: 'We will start with the background and the problem we are solving, then walk through how the system works, explain our methodology, and end with the results and our conclusions.'</a:t>
+            </a:r>
+          </a:p>
+          <a:p>
+            <a:r>
+              <a:rPr lang="en-US" dirty="0" sz="1200"/>
+              <a:t>You do not need to explain each item in detail here — just give them an idea of where the talk is going.</a:t>
+            </a:r>
+          </a:p>
+          <a:p>
+            <a:r>
+              <a:rPr lang="en-US" dirty="0" sz="1200"/>
+              <a:t>This slide should take about 30 seconds.</a:t>
+            </a:r>
+          </a:p>
+        </p:txBody>
+      </p:sp>
+      <p:sp>
+        <p:nvSpPr>
+          <p:cNvPr id="4" name="Slide Number Placeholder 3"/>
+          <p:cNvSpPr>
+            <a:spLocks noGrp="1"/>
+          </p:cNvSpPr>
+          <p:nvPr>
+            <p:ph type="sldNum" sz="quarter" idx="10"/>
+          </p:nvPr>
+        </p:nvSpPr>
+        <p:spPr/>
+        <p:txBody>
+          <a:bodyPr/>
+          <a:lstStyle/>
+          <a:p>
+            <a:fld id="{F7021451-1387-4CA6-816F-3879F97B5CBC}" type="slidenum">
+              <a:rPr lang="en-US"/>
+              <a:t>2</a:t>
+            </a:fld>
+            <a:endParaRPr lang="en-US"/>
+          </a:p>
+        </p:txBody>
+      </p:sp>
+    </p:spTree>
+    <p:extLst>
+      <p:ext uri="{BB962C8B-B14F-4D97-AF65-F5344CB8AC3E}">
+        <p14:creationId xmlns:p14="http://schemas.microsoft.com/office/powerpoint/2010/main" val="1024086991"/>
+      </p:ext>
+    </p:extLst>
+  </p:cSld>
+  <p:clrMapOvr>
+    <a:masterClrMapping/>
+  </p:clrMapOvr>
+</p:notes>
+</file>
+
+<file path=ppt\notesSlides\notesSlide3.xml><?xml version="1.0" encoding="utf-8"?>
+<p:notes xmlns:a="http://schemas.openxmlformats.org/drawingml/2006/main" xmlns:r="http://schemas.openxmlformats.org/officeDocument/2006/relationships" xmlns:p="http://schemas.openxmlformats.org/presentationml/2006/main">
+  <p:cSld>
+    <p:spTree>
+      <p:nvGrpSpPr>
+        <p:cNvPr id="1" name=""/>
+        <p:cNvGrpSpPr/>
+        <p:nvPr/>
+      </p:nvGrpSpPr>
+      <p:grpSpPr>
+        <a:xfrm>
+          <a:off x="0" y="0"/>
+          <a:ext cx="0" cy="0"/>
+          <a:chOff x="0" y="0"/>
+          <a:chExt cx="0" cy="0"/>
+        </a:xfrm>
+      </p:grpSpPr>
+      <p:sp>
+        <p:nvSpPr>
+          <p:cNvPr id="2" name="Slide Image Placeholder 1"/>
+          <p:cNvSpPr>
+            <a:spLocks noGrp="1" noRot="1" noChangeAspect="1"/>
+          </p:cNvSpPr>
+          <p:nvPr>
+            <p:ph type="sldImg"/>
+          </p:nvPr>
+        </p:nvSpPr>
+        <p:spPr/>
+      </p:sp>
+      <p:sp>
+        <p:nvSpPr>
+          <p:cNvPr id="3" name="Notes Placeholder 2"/>
+          <p:cNvSpPr>
+            <a:spLocks noGrp="1"/>
+          </p:cNvSpPr>
+          <p:nvPr>
+            <p:ph type="body" idx="1"/>
+          </p:nvPr>
+        </p:nvSpPr>
+        <p:spPr/>
+        <p:txBody>
+          <a:bodyPr/>
+          <a:lstStyle/>
+          <a:p>
+            <a:r>
+              <a:rPr lang="en-US" dirty="0" sz="1200"/>
+              <a:t>This slide explains why the study is important. Start with the global problem, then bring it closer to home.</a:t>
+            </a:r>
+          </a:p>
+          <a:p>
+            <a:r>
+              <a:rPr lang="en-US" dirty="0" sz="1200"/>
+              <a:t>Say: 'Drowsy driving is a serious problem. Studies show it causes about 20% of all highway accidents. The World Health Organization even lists road injuries as the 8th leading cause of death worldwide.'</a:t>
+            </a:r>
+          </a:p>
+          <a:p>
+            <a:r>
+              <a:rPr lang="en-US" dirty="0" sz="1200"/>
+              <a:t>Then say: 'Here in the Philippines, the LTO has reported that driver inattention and fatigue are among the top causes of road accidents.'</a:t>
+            </a:r>
+          </a:p>
+          <a:p>
+            <a:r>
+              <a:rPr lang="en-US" dirty="0" sz="1200"/>
+              <a:t>Point to the last bullet: 'The big gap is this — no affordable system combines real-time detection, a physical alert device, and emergency contact notification all in one. That is the gap SnoozeGuard fills.'</a:t>
+            </a:r>
+          </a:p>
+          <a:p>
+            <a:r>
+              <a:rPr lang="en-US" dirty="0" sz="1200"/>
+              <a:t>Speak slowly and clearly on this slide. This is where you hook the audience.</a:t>
+            </a:r>
+          </a:p>
+        </p:txBody>
+      </p:sp>
+      <p:sp>
+        <p:nvSpPr>
+          <p:cNvPr id="4" name="Slide Number Placeholder 3"/>
+          <p:cNvSpPr>
+            <a:spLocks noGrp="1"/>
+          </p:cNvSpPr>
+          <p:nvPr>
+            <p:ph type="sldNum" sz="quarter" idx="10"/>
+          </p:nvPr>
+        </p:nvSpPr>
+        <p:spPr/>
+        <p:txBody>
+          <a:bodyPr/>
+          <a:lstStyle/>
+          <a:p>
+            <a:fld id="{F7021451-1387-4CA6-816F-3879F97B5CBC}" type="slidenum">
+              <a:rPr lang="en-US"/>
+              <a:t>3</a:t>
+            </a:fld>
+            <a:endParaRPr lang="en-US"/>
+          </a:p>
+        </p:txBody>
+      </p:sp>
+    </p:spTree>
+    <p:extLst>
+      <p:ext uri="{BB962C8B-B14F-4D97-AF65-F5344CB8AC3E}">
+        <p14:creationId xmlns:p14="http://schemas.microsoft.com/office/powerpoint/2010/main" val="1024086991"/>
+      </p:ext>
+    </p:extLst>
+  </p:cSld>
+  <p:clrMapOvr>
+    <a:masterClrMapping/>
+  </p:clrMapOvr>
+</p:notes>
+</file>
+
+<file path=ppt\notesSlides\notesSlide4.xml><?xml version="1.0" encoding="utf-8"?>
+<p:notes xmlns:a="http://schemas.openxmlformats.org/drawingml/2006/main" xmlns:r="http://schemas.openxmlformats.org/officeDocument/2006/relationships" xmlns:p="http://schemas.openxmlformats.org/presentationml/2006/main">
+  <p:cSld>
+    <p:spTree>
+      <p:nvGrpSpPr>
+        <p:cNvPr id="1" name=""/>
+        <p:cNvGrpSpPr/>
+        <p:nvPr/>
+      </p:nvGrpSpPr>
+      <p:grpSpPr>
+        <a:xfrm>
+          <a:off x="0" y="0"/>
+          <a:ext cx="0" cy="0"/>
+          <a:chOff x="0" y="0"/>
+          <a:chExt cx="0" cy="0"/>
+        </a:xfrm>
+      </p:grpSpPr>
+      <p:sp>
+        <p:nvSpPr>
+          <p:cNvPr id="2" name="Slide Image Placeholder 1"/>
+          <p:cNvSpPr>
+            <a:spLocks noGrp="1" noRot="1" noChangeAspect="1"/>
+          </p:cNvSpPr>
+          <p:nvPr>
+            <p:ph type="sldImg"/>
+          </p:nvPr>
+        </p:nvSpPr>
+        <p:spPr/>
+      </p:sp>
+      <p:sp>
+        <p:nvSpPr>
+          <p:cNvPr id="3" name="Notes Placeholder 2"/>
+          <p:cNvSpPr>
+            <a:spLocks noGrp="1"/>
+          </p:cNvSpPr>
+          <p:nvPr>
+            <p:ph type="body" idx="1"/>
+          </p:nvPr>
+        </p:nvSpPr>
+        <p:spPr/>
+        <p:txBody>
+          <a:bodyPr/>
+          <a:lstStyle/>
+          <a:p>
+            <a:r>
+              <a:rPr lang="en-US" dirty="0" sz="1200"/>
+              <a:t>These are the five specific questions the study answered. Read each one clearly.</a:t>
+            </a:r>
+          </a:p>
+          <a:p>
+            <a:r>
+              <a:rPr lang="en-US" dirty="0" sz="1200"/>
+              <a:t>Question 1 is about detection — can a phone camera detect drowsiness accurately?</a:t>
+            </a:r>
+          </a:p>
+          <a:p>
+            <a:r>
+              <a:rPr lang="en-US" dirty="0" sz="1200"/>
+              <a:t>Question 2 is about the scoring model — how do we measure HOW drowsy the driver is on a scale?</a:t>
+            </a:r>
+          </a:p>
+          <a:p>
+            <a:r>
+              <a:rPr lang="en-US" dirty="0" sz="1200"/>
+              <a:t>Question 3 is about the IoT device — can a small physical device give extra alerts?</a:t>
+            </a:r>
+          </a:p>
+          <a:p>
+            <a:r>
+              <a:rPr lang="en-US" dirty="0" sz="1200"/>
+              <a:t>Question 4 is about the emergency system — can the system still notify someone even without internet?</a:t>
+            </a:r>
+          </a:p>
+          <a:p>
+            <a:r>
+              <a:rPr lang="en-US" dirty="0" sz="1200"/>
+              <a:t>Question 5 is about quality — does the system meet international software quality standards?</a:t>
+            </a:r>
+          </a:p>
+          <a:p>
+            <a:r>
+              <a:rPr lang="en-US" dirty="0" sz="1200"/>
+              <a:t>You can say: 'These five questions guided everything we built.'</a:t>
+            </a:r>
+          </a:p>
+        </p:txBody>
+      </p:sp>
+      <p:sp>
+        <p:nvSpPr>
+          <p:cNvPr id="4" name="Slide Number Placeholder 3"/>
+          <p:cNvSpPr>
+            <a:spLocks noGrp="1"/>
+          </p:cNvSpPr>
+          <p:nvPr>
+            <p:ph type="sldNum" sz="quarter" idx="10"/>
+          </p:nvPr>
+        </p:nvSpPr>
+        <p:spPr/>
+        <p:txBody>
+          <a:bodyPr/>
+          <a:lstStyle/>
+          <a:p>
+            <a:fld id="{F7021451-1387-4CA6-816F-3879F97B5CBC}" type="slidenum">
+              <a:rPr lang="en-US"/>
+              <a:t>4</a:t>
+            </a:fld>
+            <a:endParaRPr lang="en-US"/>
+          </a:p>
+        </p:txBody>
+      </p:sp>
+    </p:spTree>
+    <p:extLst>
+      <p:ext uri="{BB962C8B-B14F-4D97-AF65-F5344CB8AC3E}">
+        <p14:creationId xmlns:p14="http://schemas.microsoft.com/office/powerpoint/2010/main" val="1024086991"/>
+      </p:ext>
+    </p:extLst>
+  </p:cSld>
+  <p:clrMapOvr>
+    <a:masterClrMapping/>
+  </p:clrMapOvr>
+</p:notes>
+</file>
+
+<file path=ppt\notesSlides\notesSlide5.xml><?xml version="1.0" encoding="utf-8"?>
+<p:notes xmlns:a="http://schemas.openxmlformats.org/drawingml/2006/main" xmlns:r="http://schemas.openxmlformats.org/officeDocument/2006/relationships" xmlns:p="http://schemas.openxmlformats.org/presentationml/2006/main">
+  <p:cSld>
+    <p:spTree>
+      <p:nvGrpSpPr>
+        <p:cNvPr id="1" name=""/>
+        <p:cNvGrpSpPr/>
+        <p:nvPr/>
+      </p:nvGrpSpPr>
+      <p:grpSpPr>
+        <a:xfrm>
+          <a:off x="0" y="0"/>
+          <a:ext cx="0" cy="0"/>
+          <a:chOff x="0" y="0"/>
+          <a:chExt cx="0" cy="0"/>
+        </a:xfrm>
+      </p:grpSpPr>
+      <p:sp>
+        <p:nvSpPr>
+          <p:cNvPr id="2" name="Slide Image Placeholder 1"/>
+          <p:cNvSpPr>
+            <a:spLocks noGrp="1" noRot="1" noChangeAspect="1"/>
+          </p:cNvSpPr>
+          <p:nvPr>
+            <p:ph type="sldImg"/>
+          </p:nvPr>
+        </p:nvSpPr>
+        <p:spPr/>
+      </p:sp>
+      <p:sp>
+        <p:nvSpPr>
+          <p:cNvPr id="3" name="Notes Placeholder 2"/>
+          <p:cNvSpPr>
+            <a:spLocks noGrp="1"/>
+          </p:cNvSpPr>
+          <p:nvPr>
+            <p:ph type="body" idx="1"/>
+          </p:nvPr>
+        </p:nvSpPr>
+        <p:spPr/>
+        <p:txBody>
+          <a:bodyPr/>
+          <a:lstStyle/>
+          <a:p>
+            <a:r>
+              <a:rPr lang="en-US" dirty="0" sz="1200"/>
+              <a:t>The general objective is at the top — develop and evaluate SnoozeGuard as a working prototype.</a:t>
+            </a:r>
+          </a:p>
+          <a:p>
+            <a:r>
+              <a:rPr lang="en-US" dirty="0" sz="1200"/>
+              <a:t>For the specific objectives, you do not need to read them word for word. Instead, summarize them in plain language.</a:t>
+            </a:r>
+          </a:p>
+          <a:p>
+            <a:r>
+              <a:rPr lang="en-US" dirty="0" sz="1200"/>
+              <a:t>Say: 'We had six specific goals. First, detect drowsiness from yawning, head nodding, tilting, and sudden braking. Second, build a 10-level scoring system for how sleepy the driver is. Third, create a physical IoT device that gives audio, vibration, and light alerts. Fourth, build an emergency notification system using push notifications and SMS. Fifth, make the app work even without internet. And sixth, test the whole system using the ISO standard for software quality.'</a:t>
+            </a:r>
+          </a:p>
+        </p:txBody>
+      </p:sp>
+      <p:sp>
+        <p:nvSpPr>
+          <p:cNvPr id="4" name="Slide Number Placeholder 3"/>
+          <p:cNvSpPr>
+            <a:spLocks noGrp="1"/>
+          </p:cNvSpPr>
+          <p:nvPr>
+            <p:ph type="sldNum" sz="quarter" idx="10"/>
+          </p:nvPr>
+        </p:nvSpPr>
+        <p:spPr/>
+        <p:txBody>
+          <a:bodyPr/>
+          <a:lstStyle/>
+          <a:p>
+            <a:fld id="{F7021451-1387-4CA6-816F-3879F97B5CBC}" type="slidenum">
+              <a:rPr lang="en-US"/>
+              <a:t>5</a:t>
+            </a:fld>
+            <a:endParaRPr lang="en-US"/>
+          </a:p>
+        </p:txBody>
+      </p:sp>
+    </p:spTree>
+    <p:extLst>
+      <p:ext uri="{BB962C8B-B14F-4D97-AF65-F5344CB8AC3E}">
+        <p14:creationId xmlns:p14="http://schemas.microsoft.com/office/powerpoint/2010/main" val="1024086991"/>
+      </p:ext>
+    </p:extLst>
+  </p:cSld>
+  <p:clrMapOvr>
+    <a:masterClrMapping/>
+  </p:clrMapOvr>
+</p:notes>
+</file>
+
+<file path=ppt\notesSlides\notesSlide6.xml><?xml version="1.0" encoding="utf-8"?>
+<p:notes xmlns:a="http://schemas.openxmlformats.org/drawingml/2006/main" xmlns:r="http://schemas.openxmlformats.org/officeDocument/2006/relationships" xmlns:p="http://schemas.openxmlformats.org/presentationml/2006/main">
+  <p:cSld>
+    <p:spTree>
+      <p:nvGrpSpPr>
+        <p:cNvPr id="1" name=""/>
+        <p:cNvGrpSpPr/>
+        <p:nvPr/>
+      </p:nvGrpSpPr>
+      <p:grpSpPr>
+        <a:xfrm>
+          <a:off x="0" y="0"/>
+          <a:ext cx="0" cy="0"/>
+          <a:chOff x="0" y="0"/>
+          <a:chExt cx="0" cy="0"/>
+        </a:xfrm>
+      </p:grpSpPr>
+      <p:sp>
+        <p:nvSpPr>
+          <p:cNvPr id="2" name="Slide Image Placeholder 1"/>
+          <p:cNvSpPr>
+            <a:spLocks noGrp="1" noRot="1" noChangeAspect="1"/>
+          </p:cNvSpPr>
+          <p:nvPr>
+            <p:ph type="sldImg"/>
+          </p:nvPr>
+        </p:nvSpPr>
+        <p:spPr/>
+      </p:sp>
+      <p:sp>
+        <p:nvSpPr>
+          <p:cNvPr id="3" name="Notes Placeholder 2"/>
+          <p:cNvSpPr>
+            <a:spLocks noGrp="1"/>
+          </p:cNvSpPr>
+          <p:nvPr>
+            <p:ph type="body" idx="1"/>
+          </p:nvPr>
+        </p:nvSpPr>
+        <p:spPr/>
+        <p:txBody>
+          <a:bodyPr/>
+          <a:lstStyle/>
+          <a:p>
+            <a:r>
+              <a:rPr lang="en-US" dirty="0" sz="1200"/>
+              <a:t>This is the big picture of how everything connects.</a:t>
+            </a:r>
+          </a:p>
+          <a:p>
+            <a:r>
+              <a:rPr lang="en-US" dirty="0" sz="1200"/>
+              <a:t>Point to each part as you explain: 'The driver uses either the mobile app on Android or the web dashboard on a browser. The mobile app is the main one.'</a:t>
+            </a:r>
+          </a:p>
+          <a:p>
+            <a:r>
+              <a:rPr lang="en-US" dirty="0" sz="1200"/>
+              <a:t>'The app sends commands to the IoT alert device — a small ESP32 gadget — through WiFi using a protocol called MQTT, or through Bluetooth if WiFi is not available.'</a:t>
+            </a:r>
+          </a:p>
+          <a:p>
+            <a:r>
+              <a:rPr lang="en-US" dirty="0" sz="1200"/>
+              <a:t>'Everything is backed up to the cloud using Supabase, which stores the session data, handles logins, and sends real-time updates.'</a:t>
+            </a:r>
+          </a:p>
+          <a:p>
+            <a:r>
+              <a:rPr lang="en-US" dirty="0" sz="1200"/>
+              <a:t>'SMS alerts go through PhilSMS, which is a Philippine SMS gateway — so emergency messages are delivered through local carriers.'</a:t>
+            </a:r>
+          </a:p>
+          <a:p>
+            <a:r>
+              <a:rPr lang="en-US" dirty="0" sz="1200"/>
+              <a:t>Keep this explanation simple. The panel may ask about specific parts — be ready.</a:t>
+            </a:r>
+          </a:p>
+        </p:txBody>
+      </p:sp>
+      <p:sp>
+        <p:nvSpPr>
+          <p:cNvPr id="4" name="Slide Number Placeholder 3"/>
+          <p:cNvSpPr>
+            <a:spLocks noGrp="1"/>
+          </p:cNvSpPr>
+          <p:nvPr>
+            <p:ph type="sldNum" sz="quarter" idx="10"/>
+          </p:nvPr>
+        </p:nvSpPr>
+        <p:spPr/>
+        <p:txBody>
+          <a:bodyPr/>
+          <a:lstStyle/>
+          <a:p>
+            <a:fld id="{F7021451-1387-4CA6-816F-3879F97B5CBC}" type="slidenum">
+              <a:rPr lang="en-US"/>
+              <a:t>6</a:t>
+            </a:fld>
+            <a:endParaRPr lang="en-US"/>
+          </a:p>
+        </p:txBody>
+      </p:sp>
+    </p:spTree>
+    <p:extLst>
+      <p:ext uri="{BB962C8B-B14F-4D97-AF65-F5344CB8AC3E}">
+        <p14:creationId xmlns:p14="http://schemas.microsoft.com/office/powerpoint/2010/main" val="1024086991"/>
+      </p:ext>
+    </p:extLst>
+  </p:cSld>
+  <p:clrMapOvr>
+    <a:masterClrMapping/>
+  </p:clrMapOvr>
+</p:notes>
+</file>
+
+<file path=ppt\notesSlides\notesSlide7.xml><?xml version="1.0" encoding="utf-8"?>
+<p:notes xmlns:a="http://schemas.openxmlformats.org/drawingml/2006/main" xmlns:r="http://schemas.openxmlformats.org/officeDocument/2006/relationships" xmlns:p="http://schemas.openxmlformats.org/presentationml/2006/main">
+  <p:cSld>
+    <p:spTree>
+      <p:nvGrpSpPr>
+        <p:cNvPr id="1" name=""/>
+        <p:cNvGrpSpPr/>
+        <p:nvPr/>
+      </p:nvGrpSpPr>
+      <p:grpSpPr>
+        <a:xfrm>
+          <a:off x="0" y="0"/>
+          <a:ext cx="0" cy="0"/>
+          <a:chOff x="0" y="0"/>
+          <a:chExt cx="0" cy="0"/>
+        </a:xfrm>
+      </p:grpSpPr>
+      <p:sp>
+        <p:nvSpPr>
+          <p:cNvPr id="2" name="Slide Image Placeholder 1"/>
+          <p:cNvSpPr>
+            <a:spLocks noGrp="1" noRot="1" noChangeAspect="1"/>
+          </p:cNvSpPr>
+          <p:nvPr>
+            <p:ph type="sldImg"/>
+          </p:nvPr>
+        </p:nvSpPr>
+        <p:spPr/>
+      </p:sp>
+      <p:sp>
+        <p:nvSpPr>
+          <p:cNvPr id="3" name="Notes Placeholder 2"/>
+          <p:cNvSpPr>
+            <a:spLocks noGrp="1"/>
+          </p:cNvSpPr>
+          <p:nvPr>
+            <p:ph type="body" idx="1"/>
+          </p:nvPr>
+        </p:nvSpPr>
+        <p:spPr/>
+        <p:txBody>
+          <a:bodyPr/>
+          <a:lstStyle/>
+          <a:p>
+            <a:r>
+              <a:rPr lang="en-US" dirty="0" sz="1200"/>
+              <a:t>This slide explains how the phone detects drowsiness. Keep your explanation simple.</a:t>
+            </a:r>
+          </a:p>
+          <a:p>
+            <a:r>
+              <a:rPr lang="en-US" dirty="0" sz="1200"/>
+              <a:t>Say: 'We use Google's MediaPipe, which is an AI model that reads 478 points on the face from the camera, 60 times per second on mobile.'</a:t>
+            </a:r>
+          </a:p>
+          <a:p>
+            <a:r>
+              <a:rPr lang="en-US" dirty="0" sz="1200"/>
+              <a:t>For yawn detection: 'When the jawOpen value goes above 0.70, that means the mouth is wide open — a yawn. Once it closes again, we count it as one yawn event.'</a:t>
+            </a:r>
+          </a:p>
+          <a:p>
+            <a:r>
+              <a:rPr lang="en-US" dirty="0" sz="1200"/>
+              <a:t>For head nodding: 'The model also tracks where the head is pointing. If the head drops forward or tilts sideways past a certain angle, that is counted as a head movement event.'</a:t>
+            </a:r>
+          </a:p>
+          <a:p>
+            <a:r>
+              <a:rPr lang="en-US" dirty="0" sz="1200"/>
+              <a:t>For sustained tilt: 'If the driver tilts their head for more than 10 seconds continuously, the system automatically fires a level 8 alert — that is a serious sign of drowsiness.'</a:t>
+            </a:r>
+          </a:p>
+          <a:p>
+            <a:r>
+              <a:rPr lang="en-US" dirty="0" sz="1200"/>
+              <a:t>For braking: 'The phone's accelerometer detects sudden braking — a sign of near-miss or panic stop, which is related to fatigue.'</a:t>
+            </a:r>
+          </a:p>
+          <a:p>
+            <a:r>
+              <a:rPr lang="en-US" dirty="0" sz="1200"/>
+              <a:t>All four signals are combined to compute the drowsiness level from 0 to 10.</a:t>
+            </a:r>
+          </a:p>
+        </p:txBody>
+      </p:sp>
+      <p:sp>
+        <p:nvSpPr>
+          <p:cNvPr id="4" name="Slide Number Placeholder 3"/>
+          <p:cNvSpPr>
+            <a:spLocks noGrp="1"/>
+          </p:cNvSpPr>
+          <p:nvPr>
+            <p:ph type="sldNum" sz="quarter" idx="10"/>
+          </p:nvPr>
+        </p:nvSpPr>
+        <p:spPr/>
+        <p:txBody>
+          <a:bodyPr/>
+          <a:lstStyle/>
+          <a:p>
+            <a:fld id="{F7021451-1387-4CA6-816F-3879F97B5CBC}" type="slidenum">
+              <a:rPr lang="en-US"/>
+              <a:t>7</a:t>
+            </a:fld>
+            <a:endParaRPr lang="en-US"/>
+          </a:p>
+        </p:txBody>
+      </p:sp>
+    </p:spTree>
+    <p:extLst>
+      <p:ext uri="{BB962C8B-B14F-4D97-AF65-F5344CB8AC3E}">
+        <p14:creationId xmlns:p14="http://schemas.microsoft.com/office/powerpoint/2010/main" val="1024086991"/>
+      </p:ext>
+    </p:extLst>
+  </p:cSld>
+  <p:clrMapOvr>
+    <a:masterClrMapping/>
+  </p:clrMapOvr>
+</p:notes>
+</file>
+
+<file path=ppt\notesSlides\notesSlide8.xml><?xml version="1.0" encoding="utf-8"?>
+<p:notes xmlns:a="http://schemas.openxmlformats.org/drawingml/2006/main" xmlns:r="http://schemas.openxmlformats.org/officeDocument/2006/relationships" xmlns:p="http://schemas.openxmlformats.org/presentationml/2006/main">
+  <p:cSld>
+    <p:spTree>
+      <p:nvGrpSpPr>
+        <p:cNvPr id="1" name=""/>
+        <p:cNvGrpSpPr/>
+        <p:nvPr/>
+      </p:nvGrpSpPr>
+      <p:grpSpPr>
+        <a:xfrm>
+          <a:off x="0" y="0"/>
+          <a:ext cx="0" cy="0"/>
+          <a:chOff x="0" y="0"/>
+          <a:chExt cx="0" cy="0"/>
+        </a:xfrm>
+      </p:grpSpPr>
+      <p:sp>
+        <p:nvSpPr>
+          <p:cNvPr id="2" name="Slide Image Placeholder 1"/>
+          <p:cNvSpPr>
+            <a:spLocks noGrp="1" noRot="1" noChangeAspect="1"/>
+          </p:cNvSpPr>
+          <p:nvPr>
+            <p:ph type="sldImg"/>
+          </p:nvPr>
+        </p:nvSpPr>
+        <p:spPr/>
+      </p:sp>
+      <p:sp>
+        <p:nvSpPr>
+          <p:cNvPr id="3" name="Notes Placeholder 2"/>
+          <p:cNvSpPr>
+            <a:spLocks noGrp="1"/>
+          </p:cNvSpPr>
+          <p:nvPr>
+            <p:ph type="body" idx="1"/>
+          </p:nvPr>
+        </p:nvSpPr>
+        <p:spPr/>
+        <p:txBody>
+          <a:bodyPr/>
+          <a:lstStyle/>
+          <a:p>
+            <a:r>
+              <a:rPr lang="en-US" dirty="0" sz="1200"/>
+              <a:t>This slide shows how the alerts get stronger as the driver gets more drowsy.</a:t>
+            </a:r>
+          </a:p>
+          <a:p>
+            <a:r>
+              <a:rPr lang="en-US" dirty="0" sz="1200"/>
+              <a:t>Say: 'Think of it like a warning scale. At levels 1 and 2, the app just says a voice reminder. At levels 3 to 5, it adds vibration and an alarm sound. At levels 6 to 8, the IoT device lights up, vibrates, and plays an audio track. At levels 9 and 10, the system also starts a 120-second countdown to notify the emergency contact.'</a:t>
+            </a:r>
+          </a:p>
+          <a:p>
+            <a:r>
+              <a:rPr lang="en-US" dirty="0" sz="1200"/>
+              <a:t>Point out the dismiss guard at the bottom: 'Once the driver dismisses an alert at a certain level, the same level will not fire again in that session — it only escalates if the drowsiness gets worse.'</a:t>
+            </a:r>
+          </a:p>
+          <a:p>
+            <a:r>
+              <a:rPr lang="en-US" dirty="0" sz="1200"/>
+              <a:t>This graduated approach means the driver is not suddenly hit with a loud alarm — it builds up, giving them a chance to respond early.</a:t>
+            </a:r>
+          </a:p>
+        </p:txBody>
+      </p:sp>
+      <p:sp>
+        <p:nvSpPr>
+          <p:cNvPr id="4" name="Slide Number Placeholder 3"/>
+          <p:cNvSpPr>
+            <a:spLocks noGrp="1"/>
+          </p:cNvSpPr>
+          <p:nvPr>
+            <p:ph type="sldNum" sz="quarter" idx="10"/>
+          </p:nvPr>
+        </p:nvSpPr>
+        <p:spPr/>
+        <p:txBody>
+          <a:bodyPr/>
+          <a:lstStyle/>
+          <a:p>
+            <a:fld id="{F7021451-1387-4CA6-816F-3879F97B5CBC}" type="slidenum">
+              <a:rPr lang="en-US"/>
+              <a:t>8</a:t>
+            </a:fld>
+            <a:endParaRPr lang="en-US"/>
+          </a:p>
+        </p:txBody>
+      </p:sp>
+    </p:spTree>
+    <p:extLst>
+      <p:ext uri="{BB962C8B-B14F-4D97-AF65-F5344CB8AC3E}">
+        <p14:creationId xmlns:p14="http://schemas.microsoft.com/office/powerpoint/2010/main" val="1024086991"/>
+      </p:ext>
+    </p:extLst>
+  </p:cSld>
+  <p:clrMapOvr>
+    <a:masterClrMapping/>
+  </p:clrMapOvr>
+</p:notes>
+</file>
+
+<file path=ppt\notesSlides\notesSlide9.xml><?xml version="1.0" encoding="utf-8"?>
+<p:notes xmlns:a="http://schemas.openxmlformats.org/drawingml/2006/main" xmlns:r="http://schemas.openxmlformats.org/officeDocument/2006/relationships" xmlns:p="http://schemas.openxmlformats.org/presentationml/2006/main">
+  <p:cSld>
+    <p:spTree>
+      <p:nvGrpSpPr>
+        <p:cNvPr id="1" name=""/>
+        <p:cNvGrpSpPr/>
+        <p:nvPr/>
+      </p:nvGrpSpPr>
+      <p:grpSpPr>
+        <a:xfrm>
+          <a:off x="0" y="0"/>
+          <a:ext cx="0" cy="0"/>
+          <a:chOff x="0" y="0"/>
+          <a:chExt cx="0" cy="0"/>
+        </a:xfrm>
+      </p:grpSpPr>
+      <p:sp>
+        <p:nvSpPr>
+          <p:cNvPr id="2" name="Slide Image Placeholder 1"/>
+          <p:cNvSpPr>
+            <a:spLocks noGrp="1" noRot="1" noChangeAspect="1"/>
+          </p:cNvSpPr>
+          <p:nvPr>
+            <p:ph type="sldImg"/>
+          </p:nvPr>
+        </p:nvSpPr>
+        <p:spPr/>
+      </p:sp>
+      <p:sp>
+        <p:nvSpPr>
+          <p:cNvPr id="3" name="Notes Placeholder 2"/>
+          <p:cNvSpPr>
+            <a:spLocks noGrp="1"/>
+          </p:cNvSpPr>
+          <p:nvPr>
+            <p:ph type="body" idx="1"/>
+          </p:nvPr>
+        </p:nvSpPr>
+        <p:spPr/>
+        <p:txBody>
+          <a:bodyPr/>
+          <a:lstStyle/>
+          <a:p>
+            <a:r>
+              <a:rPr lang="en-US" dirty="0" sz="1200"/>
+              <a:t>This is the physical IoT device we built. Describe it as a small gadget the driver can place on the dashboard.</a:t>
+            </a:r>
+          </a:p>
+          <a:p>
+            <a:r>
+              <a:rPr lang="en-US" dirty="0" sz="1200"/>
+              <a:t>Say: 'The device is built around an ESP32 microcontroller — a small, affordable chip with built-in WiFi and Bluetooth. It costs roughly $5 to $10.'</a:t>
+            </a:r>
+          </a:p>
+          <a:p>
+            <a:r>
+              <a:rPr lang="en-US" dirty="0" sz="1200"/>
+              <a:t>'Inside the device, there is a DFPlayer Mini module that plays MP3 audio files from a memory card. There is also a buzzer, two LED lights, and a physical dismiss button.'</a:t>
+            </a:r>
+          </a:p>
+          <a:p>
+            <a:r>
+              <a:rPr lang="en-US" dirty="0" sz="1200"/>
+              <a:t>Walk through the table: 'At level 6, it plays a short audio and pulses the LED three times. As the level goes up, the pulses get longer and more intense. At levels 9 and 10, everything runs continuously until the driver presses the dismiss button.'</a:t>
+            </a:r>
+          </a:p>
+          <a:p>
+            <a:r>
+              <a:rPr lang="en-US" dirty="0" sz="1200"/>
+              <a:t>Point to the dismiss button logic: 'When the driver presses the button on the device, it sends a signal through WiFi to the cloud, and the mobile app receives it instantly and stops the alert.'</a:t>
+            </a:r>
+          </a:p>
+        </p:txBody>
+      </p:sp>
+      <p:sp>
+        <p:nvSpPr>
+          <p:cNvPr id="4" name="Slide Number Placeholder 3"/>
+          <p:cNvSpPr>
+            <a:spLocks noGrp="1"/>
+          </p:cNvSpPr>
+          <p:nvPr>
+            <p:ph type="sldNum" sz="quarter" idx="10"/>
+          </p:nvPr>
+        </p:nvSpPr>
+        <p:spPr/>
+        <p:txBody>
+          <a:bodyPr/>
+          <a:lstStyle/>
+          <a:p>
+            <a:fld id="{F7021451-1387-4CA6-816F-3879F97B5CBC}" type="slidenum">
+              <a:rPr lang="en-US"/>
+              <a:t>9</a:t>
+            </a:fld>
+            <a:endParaRPr lang="en-US"/>
+          </a:p>
+        </p:txBody>
+      </p:sp>
+    </p:spTree>
+    <p:extLst>
+      <p:ext uri="{BB962C8B-B14F-4D97-AF65-F5344CB8AC3E}">
+        <p14:creationId xmlns:p14="http://schemas.microsoft.com/office/powerpoint/2010/main" val="1024086991"/>
+      </p:ext>
+    </p:extLst>
+  </p:cSld>
+  <p:clrMapOvr>
+    <a:masterClrMapping/>
+  </p:clrMapOvr>
+</p:notes>
+</file>
+
+<file path=ppt\presProps.xml><?xml version="1.0" encoding="utf-8"?>
+<p:presentationPr xmlns:a="http://schemas.openxmlformats.org/drawingml/2006/main" xmlns:r="http://schemas.openxmlformats.org/officeDocument/2006/relationships" xmlns:p="http://schemas.openxmlformats.org/presentationml/2006/main"/>
+</file>
+
+<file path=ppt\presentation.xml><?xml version="1.0" encoding="utf-8"?>
 <p:presentation xmlns:a="http://schemas.openxmlformats.org/drawingml/2006/main" xmlns:r="http://schemas.openxmlformats.org/officeDocument/2006/relationships" xmlns:p="http://schemas.openxmlformats.org/presentationml/2006/main" saveSubsetFonts="1" autoCompressPictures="0">
   <p:sldMasterIdLst>
     <p:sldMasterId id="2147483648" r:id="rId1"/>
@@ -124,1940 +2650,7 @@
 </p:presentation>
 </file>
 
-<file path=ppt/notesMasters/notesMaster1.xml><?xml version="1.0" encoding="utf-8"?>
-<p:notesMaster xmlns:a="http://schemas.openxmlformats.org/drawingml/2006/main" xmlns:r="http://schemas.openxmlformats.org/officeDocument/2006/relationships" xmlns:p="http://schemas.openxmlformats.org/presentationml/2006/main">
-  <p:cSld>
-    <p:bg>
-      <p:bgRef idx="1001">
-        <a:schemeClr val="bg1"/>
-      </p:bgRef>
-    </p:bg>
-    <p:spTree>
-      <p:nvGrpSpPr>
-        <p:cNvPr id="1" name=""/>
-        <p:cNvGrpSpPr/>
-        <p:nvPr/>
-      </p:nvGrpSpPr>
-      <p:grpSpPr>
-        <a:xfrm>
-          <a:off x="0" y="0"/>
-          <a:ext cx="0" cy="0"/>
-          <a:chOff x="0" y="0"/>
-          <a:chExt cx="0" cy="0"/>
-        </a:xfrm>
-      </p:grpSpPr>
-      <p:sp>
-        <p:nvSpPr>
-          <p:cNvPr id="2" name="Header Placeholder 1"/>
-          <p:cNvSpPr>
-            <a:spLocks noGrp="1"/>
-          </p:cNvSpPr>
-          <p:nvPr>
-            <p:ph type="hdr" sz="quarter"/>
-          </p:nvPr>
-        </p:nvSpPr>
-        <p:spPr>
-          <a:xfrm>
-            <a:off x="0" y="0"/>
-            <a:ext cx="2971800" cy="458788"/>
-          </a:xfrm>
-          <a:prstGeom prst="rect">
-            <a:avLst/>
-          </a:prstGeom>
-        </p:spPr>
-        <p:txBody>
-          <a:bodyPr vert="horz" lIns="91440" tIns="45720" rIns="91440" bIns="45720" rtlCol="0"/>
-          <a:lstStyle>
-            <a:lvl1pPr algn="l">
-              <a:defRPr sz="1200"/>
-            </a:lvl1pPr>
-          </a:lstStyle>
-          <a:p>
-            <a:endParaRPr lang="en-US"/>
-          </a:p>
-        </p:txBody>
-      </p:sp>
-      <p:sp>
-        <p:nvSpPr>
-          <p:cNvPr id="3" name="Date Placeholder 2"/>
-          <p:cNvSpPr>
-            <a:spLocks noGrp="1"/>
-          </p:cNvSpPr>
-          <p:nvPr>
-            <p:ph type="dt" idx="1"/>
-          </p:nvPr>
-        </p:nvSpPr>
-        <p:spPr>
-          <a:xfrm>
-            <a:off x="3884613" y="0"/>
-            <a:ext cx="2971800" cy="458788"/>
-          </a:xfrm>
-          <a:prstGeom prst="rect">
-            <a:avLst/>
-          </a:prstGeom>
-        </p:spPr>
-        <p:txBody>
-          <a:bodyPr vert="horz" lIns="91440" tIns="45720" rIns="91440" bIns="45720" rtlCol="0"/>
-          <a:lstStyle>
-            <a:lvl1pPr algn="r">
-              <a:defRPr sz="1200"/>
-            </a:lvl1pPr>
-          </a:lstStyle>
-          <a:p>
-            <a:fld id="{5282F153-3F37-0F45-9E97-73ACFA13230C}" type="datetimeFigureOut">
-              <a:rPr lang="en-US"/>
-              <a:t>7/23/19</a:t>
-            </a:fld>
-            <a:endParaRPr lang="en-US"/>
-          </a:p>
-        </p:txBody>
-      </p:sp>
-      <p:sp>
-        <p:nvSpPr>
-          <p:cNvPr id="4" name="Slide Image Placeholder 3"/>
-          <p:cNvSpPr>
-            <a:spLocks noGrp="1" noRot="1" noChangeAspect="1"/>
-          </p:cNvSpPr>
-          <p:nvPr>
-            <p:ph type="sldImg" idx="2"/>
-          </p:nvPr>
-        </p:nvSpPr>
-        <p:spPr>
-          <a:xfrm>
-            <a:off x="685800" y="1143000"/>
-            <a:ext cx="5486400" cy="3086100"/>
-          </a:xfrm>
-          <a:prstGeom prst="rect">
-            <a:avLst/>
-          </a:prstGeom>
-          <a:noFill/>
-          <a:ln w="12700">
-            <a:solidFill>
-              <a:prstClr val="black"/>
-            </a:solidFill>
-          </a:ln>
-        </p:spPr>
-        <p:txBody>
-          <a:bodyPr vert="horz" lIns="91440" tIns="45720" rIns="91440" bIns="45720" rtlCol="0" anchor="ctr"/>
-          <a:lstStyle/>
-          <a:p>
-            <a:endParaRPr lang="en-US"/>
-          </a:p>
-        </p:txBody>
-      </p:sp>
-      <p:sp>
-        <p:nvSpPr>
-          <p:cNvPr id="5" name="Notes Placeholder 4"/>
-          <p:cNvSpPr>
-            <a:spLocks noGrp="1"/>
-          </p:cNvSpPr>
-          <p:nvPr>
-            <p:ph type="body" sz="quarter" idx="3"/>
-          </p:nvPr>
-        </p:nvSpPr>
-        <p:spPr>
-          <a:xfrm>
-            <a:off x="685800" y="4400550"/>
-            <a:ext cx="5486400" cy="3600450"/>
-          </a:xfrm>
-          <a:prstGeom prst="rect">
-            <a:avLst/>
-          </a:prstGeom>
-        </p:spPr>
-        <p:txBody>
-          <a:bodyPr vert="horz" lIns="91440" tIns="45720" rIns="91440" bIns="45720" rtlCol="0"/>
-          <a:lstStyle/>
-          <a:p>
-            <a:pPr lvl="0"/>
-            <a:r>
-              <a:rPr lang="en-US"/>
-              <a:t>Click to edit Master text styles</a:t>
-            </a:r>
-          </a:p>
-          <a:p>
-            <a:pPr lvl="1"/>
-            <a:r>
-              <a:rPr lang="en-US"/>
-              <a:t>Second level</a:t>
-            </a:r>
-          </a:p>
-          <a:p>
-            <a:pPr lvl="2"/>
-            <a:r>
-              <a:rPr lang="en-US"/>
-              <a:t>Third level</a:t>
-            </a:r>
-          </a:p>
-          <a:p>
-            <a:pPr lvl="3"/>
-            <a:r>
-              <a:rPr lang="en-US"/>
-              <a:t>Fourth level</a:t>
-            </a:r>
-          </a:p>
-          <a:p>
-            <a:pPr lvl="4"/>
-            <a:r>
-              <a:rPr lang="en-US"/>
-              <a:t>Fifth level</a:t>
-            </a:r>
-          </a:p>
-        </p:txBody>
-      </p:sp>
-      <p:sp>
-        <p:nvSpPr>
-          <p:cNvPr id="6" name="Footer Placeholder 5"/>
-          <p:cNvSpPr>
-            <a:spLocks noGrp="1"/>
-          </p:cNvSpPr>
-          <p:nvPr>
-            <p:ph type="ftr" sz="quarter" idx="4"/>
-          </p:nvPr>
-        </p:nvSpPr>
-        <p:spPr>
-          <a:xfrm>
-            <a:off x="0" y="8685213"/>
-            <a:ext cx="2971800" cy="458787"/>
-          </a:xfrm>
-          <a:prstGeom prst="rect">
-            <a:avLst/>
-          </a:prstGeom>
-        </p:spPr>
-        <p:txBody>
-          <a:bodyPr vert="horz" lIns="91440" tIns="45720" rIns="91440" bIns="45720" rtlCol="0" anchor="b"/>
-          <a:lstStyle>
-            <a:lvl1pPr algn="l">
-              <a:defRPr sz="1200"/>
-            </a:lvl1pPr>
-          </a:lstStyle>
-          <a:p>
-            <a:endParaRPr lang="en-US"/>
-          </a:p>
-        </p:txBody>
-      </p:sp>
-      <p:sp>
-        <p:nvSpPr>
-          <p:cNvPr id="7" name="Slide Number Placeholder 6"/>
-          <p:cNvSpPr>
-            <a:spLocks noGrp="1"/>
-          </p:cNvSpPr>
-          <p:nvPr>
-            <p:ph type="sldNum" sz="quarter" idx="5"/>
-          </p:nvPr>
-        </p:nvSpPr>
-        <p:spPr>
-          <a:xfrm>
-            <a:off x="3884613" y="8685213"/>
-            <a:ext cx="2971800" cy="458787"/>
-          </a:xfrm>
-          <a:prstGeom prst="rect">
-            <a:avLst/>
-          </a:prstGeom>
-        </p:spPr>
-        <p:txBody>
-          <a:bodyPr vert="horz" lIns="91440" tIns="45720" rIns="91440" bIns="45720" rtlCol="0" anchor="b"/>
-          <a:lstStyle>
-            <a:lvl1pPr algn="r">
-              <a:defRPr sz="1200"/>
-            </a:lvl1pPr>
-          </a:lstStyle>
-          <a:p>
-            <a:fld id="{CE5E9CC1-C706-0F49-92D6-E571CC5EEA8F}" type="slidenum">
-              <a:rPr lang="en-US"/>
-              <a:t>‹#›</a:t>
-            </a:fld>
-            <a:endParaRPr lang="en-US"/>
-          </a:p>
-        </p:txBody>
-      </p:sp>
-    </p:spTree>
-    <p:extLst>
-      <p:ext uri="{BB962C8B-B14F-4D97-AF65-F5344CB8AC3E}">
-        <p14:creationId xmlns:p14="http://schemas.microsoft.com/office/powerpoint/2010/main" val="1024086991"/>
-      </p:ext>
-    </p:extLst>
-  </p:cSld>
-  <p:clrMap bg1="lt1" tx1="dk1" bg2="lt2" tx2="dk2" accent1="accent1" accent2="accent2" accent3="accent3" accent4="accent4" accent5="accent5" accent6="accent6" hlink="hlink" folHlink="folHlink"/>
-  <p:notesStyle>
-    <a:lvl1pPr marL="0" algn="l" defTabSz="914400" rtl="0" eaLnBrk="1" latinLnBrk="0" hangingPunct="1">
-      <a:defRPr sz="1200" kern="1200">
-        <a:solidFill>
-          <a:schemeClr val="tx1"/>
-        </a:solidFill>
-        <a:latin typeface="+mn-lt"/>
-        <a:ea typeface="+mn-ea"/>
-        <a:cs typeface="+mn-cs"/>
-      </a:defRPr>
-    </a:lvl1pPr>
-    <a:lvl2pPr marL="457200" algn="l" defTabSz="914400" rtl="0" eaLnBrk="1" latinLnBrk="0" hangingPunct="1">
-      <a:defRPr sz="1200" kern="1200">
-        <a:solidFill>
-          <a:schemeClr val="tx1"/>
-        </a:solidFill>
-        <a:latin typeface="+mn-lt"/>
-        <a:ea typeface="+mn-ea"/>
-        <a:cs typeface="+mn-cs"/>
-      </a:defRPr>
-    </a:lvl2pPr>
-    <a:lvl3pPr marL="914400" algn="l" defTabSz="914400" rtl="0" eaLnBrk="1" latinLnBrk="0" hangingPunct="1">
-      <a:defRPr sz="1200" kern="1200">
-        <a:solidFill>
-          <a:schemeClr val="tx1"/>
-        </a:solidFill>
-        <a:latin typeface="+mn-lt"/>
-        <a:ea typeface="+mn-ea"/>
-        <a:cs typeface="+mn-cs"/>
-      </a:defRPr>
-    </a:lvl3pPr>
-    <a:lvl4pPr marL="1371600" algn="l" defTabSz="914400" rtl="0" eaLnBrk="1" latinLnBrk="0" hangingPunct="1">
-      <a:defRPr sz="1200" kern="1200">
-        <a:solidFill>
-          <a:schemeClr val="tx1"/>
-        </a:solidFill>
-        <a:latin typeface="+mn-lt"/>
-        <a:ea typeface="+mn-ea"/>
-        <a:cs typeface="+mn-cs"/>
-      </a:defRPr>
-    </a:lvl4pPr>
-    <a:lvl5pPr marL="1828800" algn="l" defTabSz="914400" rtl="0" eaLnBrk="1" latinLnBrk="0" hangingPunct="1">
-      <a:defRPr sz="1200" kern="1200">
-        <a:solidFill>
-          <a:schemeClr val="tx1"/>
-        </a:solidFill>
-        <a:latin typeface="+mn-lt"/>
-        <a:ea typeface="+mn-ea"/>
-        <a:cs typeface="+mn-cs"/>
-      </a:defRPr>
-    </a:lvl5pPr>
-    <a:lvl6pPr marL="2286000" algn="l" defTabSz="914400" rtl="0" eaLnBrk="1" latinLnBrk="0" hangingPunct="1">
-      <a:defRPr sz="1200" kern="1200">
-        <a:solidFill>
-          <a:schemeClr val="tx1"/>
-        </a:solidFill>
-        <a:latin typeface="+mn-lt"/>
-        <a:ea typeface="+mn-ea"/>
-        <a:cs typeface="+mn-cs"/>
-      </a:defRPr>
-    </a:lvl6pPr>
-    <a:lvl7pPr marL="2743200" algn="l" defTabSz="914400" rtl="0" eaLnBrk="1" latinLnBrk="0" hangingPunct="1">
-      <a:defRPr sz="1200" kern="1200">
-        <a:solidFill>
-          <a:schemeClr val="tx1"/>
-        </a:solidFill>
-        <a:latin typeface="+mn-lt"/>
-        <a:ea typeface="+mn-ea"/>
-        <a:cs typeface="+mn-cs"/>
-      </a:defRPr>
-    </a:lvl7pPr>
-    <a:lvl8pPr marL="3200400" algn="l" defTabSz="914400" rtl="0" eaLnBrk="1" latinLnBrk="0" hangingPunct="1">
-      <a:defRPr sz="1200" kern="1200">
-        <a:solidFill>
-          <a:schemeClr val="tx1"/>
-        </a:solidFill>
-        <a:latin typeface="+mn-lt"/>
-        <a:ea typeface="+mn-ea"/>
-        <a:cs typeface="+mn-cs"/>
-      </a:defRPr>
-    </a:lvl8pPr>
-    <a:lvl9pPr marL="3657600" algn="l" defTabSz="914400" rtl="0" eaLnBrk="1" latinLnBrk="0" hangingPunct="1">
-      <a:defRPr sz="1200" kern="1200">
-        <a:solidFill>
-          <a:schemeClr val="tx1"/>
-        </a:solidFill>
-        <a:latin typeface="+mn-lt"/>
-        <a:ea typeface="+mn-ea"/>
-        <a:cs typeface="+mn-cs"/>
-      </a:defRPr>
-    </a:lvl9pPr>
-  </p:notesStyle>
-</p:notesMaster>
-</file>
-
-<file path=ppt/notesSlides/notesSlide1.xml><?xml version="1.0" encoding="utf-8"?>
-<p:notes xmlns:a="http://schemas.openxmlformats.org/drawingml/2006/main" xmlns:r="http://schemas.openxmlformats.org/officeDocument/2006/relationships" xmlns:p="http://schemas.openxmlformats.org/presentationml/2006/main">
-  <p:cSld>
-    <p:spTree>
-      <p:nvGrpSpPr>
-        <p:cNvPr id="1" name=""/>
-        <p:cNvGrpSpPr/>
-        <p:nvPr/>
-      </p:nvGrpSpPr>
-      <p:grpSpPr>
-        <a:xfrm>
-          <a:off x="0" y="0"/>
-          <a:ext cx="0" cy="0"/>
-          <a:chOff x="0" y="0"/>
-          <a:chExt cx="0" cy="0"/>
-        </a:xfrm>
-      </p:grpSpPr>
-      <p:sp>
-        <p:nvSpPr>
-          <p:cNvPr id="2" name="Slide Image Placeholder 1"/>
-          <p:cNvSpPr>
-            <a:spLocks noGrp="1" noRot="1" noChangeAspect="1"/>
-          </p:cNvSpPr>
-          <p:nvPr>
-            <p:ph type="sldImg"/>
-          </p:nvPr>
-        </p:nvSpPr>
-        <p:spPr/>
-      </p:sp>
-      <p:sp>
-        <p:nvSpPr>
-          <p:cNvPr id="3" name="Notes Placeholder 2"/>
-          <p:cNvSpPr>
-            <a:spLocks noGrp="1"/>
-          </p:cNvSpPr>
-          <p:nvPr>
-            <p:ph type="body" idx="1"/>
-          </p:nvPr>
-        </p:nvSpPr>
-        <p:spPr/>
-        <p:txBody>
-          <a:bodyPr/>
-          <a:lstStyle/>
-          <a:p>
-            <a:r>
-              <a:rPr lang="en-US" dirty="0"/>
-              <a:t/>
-            </a:r>
-            <a:endParaRPr lang="en-US" dirty="0"/>
-          </a:p>
-        </p:txBody>
-      </p:sp>
-      <p:sp>
-        <p:nvSpPr>
-          <p:cNvPr id="4" name="Slide Number Placeholder 3"/>
-          <p:cNvSpPr>
-            <a:spLocks noGrp="1"/>
-          </p:cNvSpPr>
-          <p:nvPr>
-            <p:ph type="sldNum" sz="quarter" idx="10"/>
-          </p:nvPr>
-        </p:nvSpPr>
-        <p:spPr/>
-        <p:txBody>
-          <a:bodyPr/>
-          <a:lstStyle/>
-          <a:p>
-            <a:fld id="{F7021451-1387-4CA6-816F-3879F97B5CBC}" type="slidenum">
-              <a:rPr lang="en-US"/>
-              <a:t>1</a:t>
-            </a:fld>
-            <a:endParaRPr lang="en-US"/>
-          </a:p>
-        </p:txBody>
-      </p:sp>
-    </p:spTree>
-    <p:extLst>
-      <p:ext uri="{BB962C8B-B14F-4D97-AF65-F5344CB8AC3E}">
-        <p14:creationId xmlns:p14="http://schemas.microsoft.com/office/powerpoint/2010/main" val="1024086991"/>
-      </p:ext>
-    </p:extLst>
-  </p:cSld>
-  <p:clrMapOvr>
-    <a:masterClrMapping/>
-  </p:clrMapOvr>
-</p:notes>
-</file>
-
-<file path=ppt/notesSlides/notesSlide10.xml><?xml version="1.0" encoding="utf-8"?>
-<p:notes xmlns:a="http://schemas.openxmlformats.org/drawingml/2006/main" xmlns:r="http://schemas.openxmlformats.org/officeDocument/2006/relationships" xmlns:p="http://schemas.openxmlformats.org/presentationml/2006/main">
-  <p:cSld>
-    <p:spTree>
-      <p:nvGrpSpPr>
-        <p:cNvPr id="1" name=""/>
-        <p:cNvGrpSpPr/>
-        <p:nvPr/>
-      </p:nvGrpSpPr>
-      <p:grpSpPr>
-        <a:xfrm>
-          <a:off x="0" y="0"/>
-          <a:ext cx="0" cy="0"/>
-          <a:chOff x="0" y="0"/>
-          <a:chExt cx="0" cy="0"/>
-        </a:xfrm>
-      </p:grpSpPr>
-      <p:sp>
-        <p:nvSpPr>
-          <p:cNvPr id="2" name="Slide Image Placeholder 1"/>
-          <p:cNvSpPr>
-            <a:spLocks noGrp="1" noRot="1" noChangeAspect="1"/>
-          </p:cNvSpPr>
-          <p:nvPr>
-            <p:ph type="sldImg"/>
-          </p:nvPr>
-        </p:nvSpPr>
-        <p:spPr/>
-      </p:sp>
-      <p:sp>
-        <p:nvSpPr>
-          <p:cNvPr id="3" name="Notes Placeholder 2"/>
-          <p:cNvSpPr>
-            <a:spLocks noGrp="1"/>
-          </p:cNvSpPr>
-          <p:nvPr>
-            <p:ph type="body" idx="1"/>
-          </p:nvPr>
-        </p:nvSpPr>
-        <p:spPr/>
-        <p:txBody>
-          <a:bodyPr/>
-          <a:lstStyle/>
-          <a:p>
-            <a:r>
-              <a:rPr lang="en-US" dirty="0"/>
-              <a:t/>
-            </a:r>
-            <a:endParaRPr lang="en-US" dirty="0"/>
-          </a:p>
-        </p:txBody>
-      </p:sp>
-      <p:sp>
-        <p:nvSpPr>
-          <p:cNvPr id="4" name="Slide Number Placeholder 3"/>
-          <p:cNvSpPr>
-            <a:spLocks noGrp="1"/>
-          </p:cNvSpPr>
-          <p:nvPr>
-            <p:ph type="sldNum" sz="quarter" idx="10"/>
-          </p:nvPr>
-        </p:nvSpPr>
-        <p:spPr/>
-        <p:txBody>
-          <a:bodyPr/>
-          <a:lstStyle/>
-          <a:p>
-            <a:fld id="{F7021451-1387-4CA6-816F-3879F97B5CBC}" type="slidenum">
-              <a:rPr lang="en-US"/>
-              <a:t>10</a:t>
-            </a:fld>
-            <a:endParaRPr lang="en-US"/>
-          </a:p>
-        </p:txBody>
-      </p:sp>
-    </p:spTree>
-    <p:extLst>
-      <p:ext uri="{BB962C8B-B14F-4D97-AF65-F5344CB8AC3E}">
-        <p14:creationId xmlns:p14="http://schemas.microsoft.com/office/powerpoint/2010/main" val="1024086991"/>
-      </p:ext>
-    </p:extLst>
-  </p:cSld>
-  <p:clrMapOvr>
-    <a:masterClrMapping/>
-  </p:clrMapOvr>
-</p:notes>
-</file>
-
-<file path=ppt/notesSlides/notesSlide11.xml><?xml version="1.0" encoding="utf-8"?>
-<p:notes xmlns:a="http://schemas.openxmlformats.org/drawingml/2006/main" xmlns:r="http://schemas.openxmlformats.org/officeDocument/2006/relationships" xmlns:p="http://schemas.openxmlformats.org/presentationml/2006/main">
-  <p:cSld>
-    <p:spTree>
-      <p:nvGrpSpPr>
-        <p:cNvPr id="1" name=""/>
-        <p:cNvGrpSpPr/>
-        <p:nvPr/>
-      </p:nvGrpSpPr>
-      <p:grpSpPr>
-        <a:xfrm>
-          <a:off x="0" y="0"/>
-          <a:ext cx="0" cy="0"/>
-          <a:chOff x="0" y="0"/>
-          <a:chExt cx="0" cy="0"/>
-        </a:xfrm>
-      </p:grpSpPr>
-      <p:sp>
-        <p:nvSpPr>
-          <p:cNvPr id="2" name="Slide Image Placeholder 1"/>
-          <p:cNvSpPr>
-            <a:spLocks noGrp="1" noRot="1" noChangeAspect="1"/>
-          </p:cNvSpPr>
-          <p:nvPr>
-            <p:ph type="sldImg"/>
-          </p:nvPr>
-        </p:nvSpPr>
-        <p:spPr/>
-      </p:sp>
-      <p:sp>
-        <p:nvSpPr>
-          <p:cNvPr id="3" name="Notes Placeholder 2"/>
-          <p:cNvSpPr>
-            <a:spLocks noGrp="1"/>
-          </p:cNvSpPr>
-          <p:nvPr>
-            <p:ph type="body" idx="1"/>
-          </p:nvPr>
-        </p:nvSpPr>
-        <p:spPr/>
-        <p:txBody>
-          <a:bodyPr/>
-          <a:lstStyle/>
-          <a:p>
-            <a:r>
-              <a:rPr lang="en-US" dirty="0"/>
-              <a:t/>
-            </a:r>
-            <a:endParaRPr lang="en-US" dirty="0"/>
-          </a:p>
-        </p:txBody>
-      </p:sp>
-      <p:sp>
-        <p:nvSpPr>
-          <p:cNvPr id="4" name="Slide Number Placeholder 3"/>
-          <p:cNvSpPr>
-            <a:spLocks noGrp="1"/>
-          </p:cNvSpPr>
-          <p:nvPr>
-            <p:ph type="sldNum" sz="quarter" idx="10"/>
-          </p:nvPr>
-        </p:nvSpPr>
-        <p:spPr/>
-        <p:txBody>
-          <a:bodyPr/>
-          <a:lstStyle/>
-          <a:p>
-            <a:fld id="{F7021451-1387-4CA6-816F-3879F97B5CBC}" type="slidenum">
-              <a:rPr lang="en-US"/>
-              <a:t>11</a:t>
-            </a:fld>
-            <a:endParaRPr lang="en-US"/>
-          </a:p>
-        </p:txBody>
-      </p:sp>
-    </p:spTree>
-    <p:extLst>
-      <p:ext uri="{BB962C8B-B14F-4D97-AF65-F5344CB8AC3E}">
-        <p14:creationId xmlns:p14="http://schemas.microsoft.com/office/powerpoint/2010/main" val="1024086991"/>
-      </p:ext>
-    </p:extLst>
-  </p:cSld>
-  <p:clrMapOvr>
-    <a:masterClrMapping/>
-  </p:clrMapOvr>
-</p:notes>
-</file>
-
-<file path=ppt/notesSlides/notesSlide12.xml><?xml version="1.0" encoding="utf-8"?>
-<p:notes xmlns:a="http://schemas.openxmlformats.org/drawingml/2006/main" xmlns:r="http://schemas.openxmlformats.org/officeDocument/2006/relationships" xmlns:p="http://schemas.openxmlformats.org/presentationml/2006/main">
-  <p:cSld>
-    <p:spTree>
-      <p:nvGrpSpPr>
-        <p:cNvPr id="1" name=""/>
-        <p:cNvGrpSpPr/>
-        <p:nvPr/>
-      </p:nvGrpSpPr>
-      <p:grpSpPr>
-        <a:xfrm>
-          <a:off x="0" y="0"/>
-          <a:ext cx="0" cy="0"/>
-          <a:chOff x="0" y="0"/>
-          <a:chExt cx="0" cy="0"/>
-        </a:xfrm>
-      </p:grpSpPr>
-      <p:sp>
-        <p:nvSpPr>
-          <p:cNvPr id="2" name="Slide Image Placeholder 1"/>
-          <p:cNvSpPr>
-            <a:spLocks noGrp="1" noRot="1" noChangeAspect="1"/>
-          </p:cNvSpPr>
-          <p:nvPr>
-            <p:ph type="sldImg"/>
-          </p:nvPr>
-        </p:nvSpPr>
-        <p:spPr/>
-      </p:sp>
-      <p:sp>
-        <p:nvSpPr>
-          <p:cNvPr id="3" name="Notes Placeholder 2"/>
-          <p:cNvSpPr>
-            <a:spLocks noGrp="1"/>
-          </p:cNvSpPr>
-          <p:nvPr>
-            <p:ph type="body" idx="1"/>
-          </p:nvPr>
-        </p:nvSpPr>
-        <p:spPr/>
-        <p:txBody>
-          <a:bodyPr/>
-          <a:lstStyle/>
-          <a:p>
-            <a:r>
-              <a:rPr lang="en-US" dirty="0"/>
-              <a:t/>
-            </a:r>
-            <a:endParaRPr lang="en-US" dirty="0"/>
-          </a:p>
-        </p:txBody>
-      </p:sp>
-      <p:sp>
-        <p:nvSpPr>
-          <p:cNvPr id="4" name="Slide Number Placeholder 3"/>
-          <p:cNvSpPr>
-            <a:spLocks noGrp="1"/>
-          </p:cNvSpPr>
-          <p:nvPr>
-            <p:ph type="sldNum" sz="quarter" idx="10"/>
-          </p:nvPr>
-        </p:nvSpPr>
-        <p:spPr/>
-        <p:txBody>
-          <a:bodyPr/>
-          <a:lstStyle/>
-          <a:p>
-            <a:fld id="{F7021451-1387-4CA6-816F-3879F97B5CBC}" type="slidenum">
-              <a:rPr lang="en-US"/>
-              <a:t>12</a:t>
-            </a:fld>
-            <a:endParaRPr lang="en-US"/>
-          </a:p>
-        </p:txBody>
-      </p:sp>
-    </p:spTree>
-    <p:extLst>
-      <p:ext uri="{BB962C8B-B14F-4D97-AF65-F5344CB8AC3E}">
-        <p14:creationId xmlns:p14="http://schemas.microsoft.com/office/powerpoint/2010/main" val="1024086991"/>
-      </p:ext>
-    </p:extLst>
-  </p:cSld>
-  <p:clrMapOvr>
-    <a:masterClrMapping/>
-  </p:clrMapOvr>
-</p:notes>
-</file>
-
-<file path=ppt/notesSlides/notesSlide13.xml><?xml version="1.0" encoding="utf-8"?>
-<p:notes xmlns:a="http://schemas.openxmlformats.org/drawingml/2006/main" xmlns:r="http://schemas.openxmlformats.org/officeDocument/2006/relationships" xmlns:p="http://schemas.openxmlformats.org/presentationml/2006/main">
-  <p:cSld>
-    <p:spTree>
-      <p:nvGrpSpPr>
-        <p:cNvPr id="1" name=""/>
-        <p:cNvGrpSpPr/>
-        <p:nvPr/>
-      </p:nvGrpSpPr>
-      <p:grpSpPr>
-        <a:xfrm>
-          <a:off x="0" y="0"/>
-          <a:ext cx="0" cy="0"/>
-          <a:chOff x="0" y="0"/>
-          <a:chExt cx="0" cy="0"/>
-        </a:xfrm>
-      </p:grpSpPr>
-      <p:sp>
-        <p:nvSpPr>
-          <p:cNvPr id="2" name="Slide Image Placeholder 1"/>
-          <p:cNvSpPr>
-            <a:spLocks noGrp="1" noRot="1" noChangeAspect="1"/>
-          </p:cNvSpPr>
-          <p:nvPr>
-            <p:ph type="sldImg"/>
-          </p:nvPr>
-        </p:nvSpPr>
-        <p:spPr/>
-      </p:sp>
-      <p:sp>
-        <p:nvSpPr>
-          <p:cNvPr id="3" name="Notes Placeholder 2"/>
-          <p:cNvSpPr>
-            <a:spLocks noGrp="1"/>
-          </p:cNvSpPr>
-          <p:nvPr>
-            <p:ph type="body" idx="1"/>
-          </p:nvPr>
-        </p:nvSpPr>
-        <p:spPr/>
-        <p:txBody>
-          <a:bodyPr/>
-          <a:lstStyle/>
-          <a:p>
-            <a:r>
-              <a:rPr lang="en-US" dirty="0"/>
-              <a:t/>
-            </a:r>
-            <a:endParaRPr lang="en-US" dirty="0"/>
-          </a:p>
-        </p:txBody>
-      </p:sp>
-      <p:sp>
-        <p:nvSpPr>
-          <p:cNvPr id="4" name="Slide Number Placeholder 3"/>
-          <p:cNvSpPr>
-            <a:spLocks noGrp="1"/>
-          </p:cNvSpPr>
-          <p:nvPr>
-            <p:ph type="sldNum" sz="quarter" idx="10"/>
-          </p:nvPr>
-        </p:nvSpPr>
-        <p:spPr/>
-        <p:txBody>
-          <a:bodyPr/>
-          <a:lstStyle/>
-          <a:p>
-            <a:fld id="{F7021451-1387-4CA6-816F-3879F97B5CBC}" type="slidenum">
-              <a:rPr lang="en-US"/>
-              <a:t>13</a:t>
-            </a:fld>
-            <a:endParaRPr lang="en-US"/>
-          </a:p>
-        </p:txBody>
-      </p:sp>
-    </p:spTree>
-    <p:extLst>
-      <p:ext uri="{BB962C8B-B14F-4D97-AF65-F5344CB8AC3E}">
-        <p14:creationId xmlns:p14="http://schemas.microsoft.com/office/powerpoint/2010/main" val="1024086991"/>
-      </p:ext>
-    </p:extLst>
-  </p:cSld>
-  <p:clrMapOvr>
-    <a:masterClrMapping/>
-  </p:clrMapOvr>
-</p:notes>
-</file>
-
-<file path=ppt/notesSlides/notesSlide14.xml><?xml version="1.0" encoding="utf-8"?>
-<p:notes xmlns:a="http://schemas.openxmlformats.org/drawingml/2006/main" xmlns:r="http://schemas.openxmlformats.org/officeDocument/2006/relationships" xmlns:p="http://schemas.openxmlformats.org/presentationml/2006/main">
-  <p:cSld>
-    <p:spTree>
-      <p:nvGrpSpPr>
-        <p:cNvPr id="1" name=""/>
-        <p:cNvGrpSpPr/>
-        <p:nvPr/>
-      </p:nvGrpSpPr>
-      <p:grpSpPr>
-        <a:xfrm>
-          <a:off x="0" y="0"/>
-          <a:ext cx="0" cy="0"/>
-          <a:chOff x="0" y="0"/>
-          <a:chExt cx="0" cy="0"/>
-        </a:xfrm>
-      </p:grpSpPr>
-      <p:sp>
-        <p:nvSpPr>
-          <p:cNvPr id="2" name="Slide Image Placeholder 1"/>
-          <p:cNvSpPr>
-            <a:spLocks noGrp="1" noRot="1" noChangeAspect="1"/>
-          </p:cNvSpPr>
-          <p:nvPr>
-            <p:ph type="sldImg"/>
-          </p:nvPr>
-        </p:nvSpPr>
-        <p:spPr/>
-      </p:sp>
-      <p:sp>
-        <p:nvSpPr>
-          <p:cNvPr id="3" name="Notes Placeholder 2"/>
-          <p:cNvSpPr>
-            <a:spLocks noGrp="1"/>
-          </p:cNvSpPr>
-          <p:nvPr>
-            <p:ph type="body" idx="1"/>
-          </p:nvPr>
-        </p:nvSpPr>
-        <p:spPr/>
-        <p:txBody>
-          <a:bodyPr/>
-          <a:lstStyle/>
-          <a:p>
-            <a:r>
-              <a:rPr lang="en-US" dirty="0"/>
-              <a:t/>
-            </a:r>
-            <a:endParaRPr lang="en-US" dirty="0"/>
-          </a:p>
-        </p:txBody>
-      </p:sp>
-      <p:sp>
-        <p:nvSpPr>
-          <p:cNvPr id="4" name="Slide Number Placeholder 3"/>
-          <p:cNvSpPr>
-            <a:spLocks noGrp="1"/>
-          </p:cNvSpPr>
-          <p:nvPr>
-            <p:ph type="sldNum" sz="quarter" idx="10"/>
-          </p:nvPr>
-        </p:nvSpPr>
-        <p:spPr/>
-        <p:txBody>
-          <a:bodyPr/>
-          <a:lstStyle/>
-          <a:p>
-            <a:fld id="{F7021451-1387-4CA6-816F-3879F97B5CBC}" type="slidenum">
-              <a:rPr lang="en-US"/>
-              <a:t>14</a:t>
-            </a:fld>
-            <a:endParaRPr lang="en-US"/>
-          </a:p>
-        </p:txBody>
-      </p:sp>
-    </p:spTree>
-    <p:extLst>
-      <p:ext uri="{BB962C8B-B14F-4D97-AF65-F5344CB8AC3E}">
-        <p14:creationId xmlns:p14="http://schemas.microsoft.com/office/powerpoint/2010/main" val="1024086991"/>
-      </p:ext>
-    </p:extLst>
-  </p:cSld>
-  <p:clrMapOvr>
-    <a:masterClrMapping/>
-  </p:clrMapOvr>
-</p:notes>
-</file>
-
-<file path=ppt/notesSlides/notesSlide15.xml><?xml version="1.0" encoding="utf-8"?>
-<p:notes xmlns:a="http://schemas.openxmlformats.org/drawingml/2006/main" xmlns:r="http://schemas.openxmlformats.org/officeDocument/2006/relationships" xmlns:p="http://schemas.openxmlformats.org/presentationml/2006/main">
-  <p:cSld>
-    <p:spTree>
-      <p:nvGrpSpPr>
-        <p:cNvPr id="1" name=""/>
-        <p:cNvGrpSpPr/>
-        <p:nvPr/>
-      </p:nvGrpSpPr>
-      <p:grpSpPr>
-        <a:xfrm>
-          <a:off x="0" y="0"/>
-          <a:ext cx="0" cy="0"/>
-          <a:chOff x="0" y="0"/>
-          <a:chExt cx="0" cy="0"/>
-        </a:xfrm>
-      </p:grpSpPr>
-      <p:sp>
-        <p:nvSpPr>
-          <p:cNvPr id="2" name="Slide Image Placeholder 1"/>
-          <p:cNvSpPr>
-            <a:spLocks noGrp="1" noRot="1" noChangeAspect="1"/>
-          </p:cNvSpPr>
-          <p:nvPr>
-            <p:ph type="sldImg"/>
-          </p:nvPr>
-        </p:nvSpPr>
-        <p:spPr/>
-      </p:sp>
-      <p:sp>
-        <p:nvSpPr>
-          <p:cNvPr id="3" name="Notes Placeholder 2"/>
-          <p:cNvSpPr>
-            <a:spLocks noGrp="1"/>
-          </p:cNvSpPr>
-          <p:nvPr>
-            <p:ph type="body" idx="1"/>
-          </p:nvPr>
-        </p:nvSpPr>
-        <p:spPr/>
-        <p:txBody>
-          <a:bodyPr/>
-          <a:lstStyle/>
-          <a:p>
-            <a:r>
-              <a:rPr lang="en-US" dirty="0"/>
-              <a:t/>
-            </a:r>
-            <a:endParaRPr lang="en-US" dirty="0"/>
-          </a:p>
-        </p:txBody>
-      </p:sp>
-      <p:sp>
-        <p:nvSpPr>
-          <p:cNvPr id="4" name="Slide Number Placeholder 3"/>
-          <p:cNvSpPr>
-            <a:spLocks noGrp="1"/>
-          </p:cNvSpPr>
-          <p:nvPr>
-            <p:ph type="sldNum" sz="quarter" idx="10"/>
-          </p:nvPr>
-        </p:nvSpPr>
-        <p:spPr/>
-        <p:txBody>
-          <a:bodyPr/>
-          <a:lstStyle/>
-          <a:p>
-            <a:fld id="{F7021451-1387-4CA6-816F-3879F97B5CBC}" type="slidenum">
-              <a:rPr lang="en-US"/>
-              <a:t>15</a:t>
-            </a:fld>
-            <a:endParaRPr lang="en-US"/>
-          </a:p>
-        </p:txBody>
-      </p:sp>
-    </p:spTree>
-    <p:extLst>
-      <p:ext uri="{BB962C8B-B14F-4D97-AF65-F5344CB8AC3E}">
-        <p14:creationId xmlns:p14="http://schemas.microsoft.com/office/powerpoint/2010/main" val="1024086991"/>
-      </p:ext>
-    </p:extLst>
-  </p:cSld>
-  <p:clrMapOvr>
-    <a:masterClrMapping/>
-  </p:clrMapOvr>
-</p:notes>
-</file>
-
-<file path=ppt/notesSlides/notesSlide16.xml><?xml version="1.0" encoding="utf-8"?>
-<p:notes xmlns:a="http://schemas.openxmlformats.org/drawingml/2006/main" xmlns:r="http://schemas.openxmlformats.org/officeDocument/2006/relationships" xmlns:p="http://schemas.openxmlformats.org/presentationml/2006/main">
-  <p:cSld>
-    <p:spTree>
-      <p:nvGrpSpPr>
-        <p:cNvPr id="1" name=""/>
-        <p:cNvGrpSpPr/>
-        <p:nvPr/>
-      </p:nvGrpSpPr>
-      <p:grpSpPr>
-        <a:xfrm>
-          <a:off x="0" y="0"/>
-          <a:ext cx="0" cy="0"/>
-          <a:chOff x="0" y="0"/>
-          <a:chExt cx="0" cy="0"/>
-        </a:xfrm>
-      </p:grpSpPr>
-      <p:sp>
-        <p:nvSpPr>
-          <p:cNvPr id="2" name="Slide Image Placeholder 1"/>
-          <p:cNvSpPr>
-            <a:spLocks noGrp="1" noRot="1" noChangeAspect="1"/>
-          </p:cNvSpPr>
-          <p:nvPr>
-            <p:ph type="sldImg"/>
-          </p:nvPr>
-        </p:nvSpPr>
-        <p:spPr/>
-      </p:sp>
-      <p:sp>
-        <p:nvSpPr>
-          <p:cNvPr id="3" name="Notes Placeholder 2"/>
-          <p:cNvSpPr>
-            <a:spLocks noGrp="1"/>
-          </p:cNvSpPr>
-          <p:nvPr>
-            <p:ph type="body" idx="1"/>
-          </p:nvPr>
-        </p:nvSpPr>
-        <p:spPr/>
-        <p:txBody>
-          <a:bodyPr/>
-          <a:lstStyle/>
-          <a:p>
-            <a:r>
-              <a:rPr lang="en-US" dirty="0"/>
-              <a:t/>
-            </a:r>
-            <a:endParaRPr lang="en-US" dirty="0"/>
-          </a:p>
-        </p:txBody>
-      </p:sp>
-      <p:sp>
-        <p:nvSpPr>
-          <p:cNvPr id="4" name="Slide Number Placeholder 3"/>
-          <p:cNvSpPr>
-            <a:spLocks noGrp="1"/>
-          </p:cNvSpPr>
-          <p:nvPr>
-            <p:ph type="sldNum" sz="quarter" idx="10"/>
-          </p:nvPr>
-        </p:nvSpPr>
-        <p:spPr/>
-        <p:txBody>
-          <a:bodyPr/>
-          <a:lstStyle/>
-          <a:p>
-            <a:fld id="{F7021451-1387-4CA6-816F-3879F97B5CBC}" type="slidenum">
-              <a:rPr lang="en-US"/>
-              <a:t>16</a:t>
-            </a:fld>
-            <a:endParaRPr lang="en-US"/>
-          </a:p>
-        </p:txBody>
-      </p:sp>
-    </p:spTree>
-    <p:extLst>
-      <p:ext uri="{BB962C8B-B14F-4D97-AF65-F5344CB8AC3E}">
-        <p14:creationId xmlns:p14="http://schemas.microsoft.com/office/powerpoint/2010/main" val="1024086991"/>
-      </p:ext>
-    </p:extLst>
-  </p:cSld>
-  <p:clrMapOvr>
-    <a:masterClrMapping/>
-  </p:clrMapOvr>
-</p:notes>
-</file>
-
-<file path=ppt/notesSlides/notesSlide17.xml><?xml version="1.0" encoding="utf-8"?>
-<p:notes xmlns:a="http://schemas.openxmlformats.org/drawingml/2006/main" xmlns:r="http://schemas.openxmlformats.org/officeDocument/2006/relationships" xmlns:p="http://schemas.openxmlformats.org/presentationml/2006/main">
-  <p:cSld>
-    <p:spTree>
-      <p:nvGrpSpPr>
-        <p:cNvPr id="1" name=""/>
-        <p:cNvGrpSpPr/>
-        <p:nvPr/>
-      </p:nvGrpSpPr>
-      <p:grpSpPr>
-        <a:xfrm>
-          <a:off x="0" y="0"/>
-          <a:ext cx="0" cy="0"/>
-          <a:chOff x="0" y="0"/>
-          <a:chExt cx="0" cy="0"/>
-        </a:xfrm>
-      </p:grpSpPr>
-      <p:sp>
-        <p:nvSpPr>
-          <p:cNvPr id="2" name="Slide Image Placeholder 1"/>
-          <p:cNvSpPr>
-            <a:spLocks noGrp="1" noRot="1" noChangeAspect="1"/>
-          </p:cNvSpPr>
-          <p:nvPr>
-            <p:ph type="sldImg"/>
-          </p:nvPr>
-        </p:nvSpPr>
-        <p:spPr/>
-      </p:sp>
-      <p:sp>
-        <p:nvSpPr>
-          <p:cNvPr id="3" name="Notes Placeholder 2"/>
-          <p:cNvSpPr>
-            <a:spLocks noGrp="1"/>
-          </p:cNvSpPr>
-          <p:nvPr>
-            <p:ph type="body" idx="1"/>
-          </p:nvPr>
-        </p:nvSpPr>
-        <p:spPr/>
-        <p:txBody>
-          <a:bodyPr/>
-          <a:lstStyle/>
-          <a:p>
-            <a:r>
-              <a:rPr lang="en-US" dirty="0"/>
-              <a:t/>
-            </a:r>
-            <a:endParaRPr lang="en-US" dirty="0"/>
-          </a:p>
-        </p:txBody>
-      </p:sp>
-      <p:sp>
-        <p:nvSpPr>
-          <p:cNvPr id="4" name="Slide Number Placeholder 3"/>
-          <p:cNvSpPr>
-            <a:spLocks noGrp="1"/>
-          </p:cNvSpPr>
-          <p:nvPr>
-            <p:ph type="sldNum" sz="quarter" idx="10"/>
-          </p:nvPr>
-        </p:nvSpPr>
-        <p:spPr/>
-        <p:txBody>
-          <a:bodyPr/>
-          <a:lstStyle/>
-          <a:p>
-            <a:fld id="{F7021451-1387-4CA6-816F-3879F97B5CBC}" type="slidenum">
-              <a:rPr lang="en-US"/>
-              <a:t>17</a:t>
-            </a:fld>
-            <a:endParaRPr lang="en-US"/>
-          </a:p>
-        </p:txBody>
-      </p:sp>
-    </p:spTree>
-    <p:extLst>
-      <p:ext uri="{BB962C8B-B14F-4D97-AF65-F5344CB8AC3E}">
-        <p14:creationId xmlns:p14="http://schemas.microsoft.com/office/powerpoint/2010/main" val="1024086991"/>
-      </p:ext>
-    </p:extLst>
-  </p:cSld>
-  <p:clrMapOvr>
-    <a:masterClrMapping/>
-  </p:clrMapOvr>
-</p:notes>
-</file>
-
-<file path=ppt/notesSlides/notesSlide18.xml><?xml version="1.0" encoding="utf-8"?>
-<p:notes xmlns:a="http://schemas.openxmlformats.org/drawingml/2006/main" xmlns:r="http://schemas.openxmlformats.org/officeDocument/2006/relationships" xmlns:p="http://schemas.openxmlformats.org/presentationml/2006/main">
-  <p:cSld>
-    <p:spTree>
-      <p:nvGrpSpPr>
-        <p:cNvPr id="1" name=""/>
-        <p:cNvGrpSpPr/>
-        <p:nvPr/>
-      </p:nvGrpSpPr>
-      <p:grpSpPr>
-        <a:xfrm>
-          <a:off x="0" y="0"/>
-          <a:ext cx="0" cy="0"/>
-          <a:chOff x="0" y="0"/>
-          <a:chExt cx="0" cy="0"/>
-        </a:xfrm>
-      </p:grpSpPr>
-      <p:sp>
-        <p:nvSpPr>
-          <p:cNvPr id="2" name="Slide Image Placeholder 1"/>
-          <p:cNvSpPr>
-            <a:spLocks noGrp="1" noRot="1" noChangeAspect="1"/>
-          </p:cNvSpPr>
-          <p:nvPr>
-            <p:ph type="sldImg"/>
-          </p:nvPr>
-        </p:nvSpPr>
-        <p:spPr/>
-      </p:sp>
-      <p:sp>
-        <p:nvSpPr>
-          <p:cNvPr id="3" name="Notes Placeholder 2"/>
-          <p:cNvSpPr>
-            <a:spLocks noGrp="1"/>
-          </p:cNvSpPr>
-          <p:nvPr>
-            <p:ph type="body" idx="1"/>
-          </p:nvPr>
-        </p:nvSpPr>
-        <p:spPr/>
-        <p:txBody>
-          <a:bodyPr/>
-          <a:lstStyle/>
-          <a:p>
-            <a:r>
-              <a:rPr lang="en-US" dirty="0"/>
-              <a:t/>
-            </a:r>
-            <a:endParaRPr lang="en-US" dirty="0"/>
-          </a:p>
-        </p:txBody>
-      </p:sp>
-      <p:sp>
-        <p:nvSpPr>
-          <p:cNvPr id="4" name="Slide Number Placeholder 3"/>
-          <p:cNvSpPr>
-            <a:spLocks noGrp="1"/>
-          </p:cNvSpPr>
-          <p:nvPr>
-            <p:ph type="sldNum" sz="quarter" idx="10"/>
-          </p:nvPr>
-        </p:nvSpPr>
-        <p:spPr/>
-        <p:txBody>
-          <a:bodyPr/>
-          <a:lstStyle/>
-          <a:p>
-            <a:fld id="{F7021451-1387-4CA6-816F-3879F97B5CBC}" type="slidenum">
-              <a:rPr lang="en-US"/>
-              <a:t>18</a:t>
-            </a:fld>
-            <a:endParaRPr lang="en-US"/>
-          </a:p>
-        </p:txBody>
-      </p:sp>
-    </p:spTree>
-    <p:extLst>
-      <p:ext uri="{BB962C8B-B14F-4D97-AF65-F5344CB8AC3E}">
-        <p14:creationId xmlns:p14="http://schemas.microsoft.com/office/powerpoint/2010/main" val="1024086991"/>
-      </p:ext>
-    </p:extLst>
-  </p:cSld>
-  <p:clrMapOvr>
-    <a:masterClrMapping/>
-  </p:clrMapOvr>
-</p:notes>
-</file>
-
-<file path=ppt/notesSlides/notesSlide2.xml><?xml version="1.0" encoding="utf-8"?>
-<p:notes xmlns:a="http://schemas.openxmlformats.org/drawingml/2006/main" xmlns:r="http://schemas.openxmlformats.org/officeDocument/2006/relationships" xmlns:p="http://schemas.openxmlformats.org/presentationml/2006/main">
-  <p:cSld>
-    <p:spTree>
-      <p:nvGrpSpPr>
-        <p:cNvPr id="1" name=""/>
-        <p:cNvGrpSpPr/>
-        <p:nvPr/>
-      </p:nvGrpSpPr>
-      <p:grpSpPr>
-        <a:xfrm>
-          <a:off x="0" y="0"/>
-          <a:ext cx="0" cy="0"/>
-          <a:chOff x="0" y="0"/>
-          <a:chExt cx="0" cy="0"/>
-        </a:xfrm>
-      </p:grpSpPr>
-      <p:sp>
-        <p:nvSpPr>
-          <p:cNvPr id="2" name="Slide Image Placeholder 1"/>
-          <p:cNvSpPr>
-            <a:spLocks noGrp="1" noRot="1" noChangeAspect="1"/>
-          </p:cNvSpPr>
-          <p:nvPr>
-            <p:ph type="sldImg"/>
-          </p:nvPr>
-        </p:nvSpPr>
-        <p:spPr/>
-      </p:sp>
-      <p:sp>
-        <p:nvSpPr>
-          <p:cNvPr id="3" name="Notes Placeholder 2"/>
-          <p:cNvSpPr>
-            <a:spLocks noGrp="1"/>
-          </p:cNvSpPr>
-          <p:nvPr>
-            <p:ph type="body" idx="1"/>
-          </p:nvPr>
-        </p:nvSpPr>
-        <p:spPr/>
-        <p:txBody>
-          <a:bodyPr/>
-          <a:lstStyle/>
-          <a:p>
-            <a:r>
-              <a:rPr lang="en-US" dirty="0"/>
-              <a:t/>
-            </a:r>
-            <a:endParaRPr lang="en-US" dirty="0"/>
-          </a:p>
-        </p:txBody>
-      </p:sp>
-      <p:sp>
-        <p:nvSpPr>
-          <p:cNvPr id="4" name="Slide Number Placeholder 3"/>
-          <p:cNvSpPr>
-            <a:spLocks noGrp="1"/>
-          </p:cNvSpPr>
-          <p:nvPr>
-            <p:ph type="sldNum" sz="quarter" idx="10"/>
-          </p:nvPr>
-        </p:nvSpPr>
-        <p:spPr/>
-        <p:txBody>
-          <a:bodyPr/>
-          <a:lstStyle/>
-          <a:p>
-            <a:fld id="{F7021451-1387-4CA6-816F-3879F97B5CBC}" type="slidenum">
-              <a:rPr lang="en-US"/>
-              <a:t>2</a:t>
-            </a:fld>
-            <a:endParaRPr lang="en-US"/>
-          </a:p>
-        </p:txBody>
-      </p:sp>
-    </p:spTree>
-    <p:extLst>
-      <p:ext uri="{BB962C8B-B14F-4D97-AF65-F5344CB8AC3E}">
-        <p14:creationId xmlns:p14="http://schemas.microsoft.com/office/powerpoint/2010/main" val="1024086991"/>
-      </p:ext>
-    </p:extLst>
-  </p:cSld>
-  <p:clrMapOvr>
-    <a:masterClrMapping/>
-  </p:clrMapOvr>
-</p:notes>
-</file>
-
-<file path=ppt/notesSlides/notesSlide3.xml><?xml version="1.0" encoding="utf-8"?>
-<p:notes xmlns:a="http://schemas.openxmlformats.org/drawingml/2006/main" xmlns:r="http://schemas.openxmlformats.org/officeDocument/2006/relationships" xmlns:p="http://schemas.openxmlformats.org/presentationml/2006/main">
-  <p:cSld>
-    <p:spTree>
-      <p:nvGrpSpPr>
-        <p:cNvPr id="1" name=""/>
-        <p:cNvGrpSpPr/>
-        <p:nvPr/>
-      </p:nvGrpSpPr>
-      <p:grpSpPr>
-        <a:xfrm>
-          <a:off x="0" y="0"/>
-          <a:ext cx="0" cy="0"/>
-          <a:chOff x="0" y="0"/>
-          <a:chExt cx="0" cy="0"/>
-        </a:xfrm>
-      </p:grpSpPr>
-      <p:sp>
-        <p:nvSpPr>
-          <p:cNvPr id="2" name="Slide Image Placeholder 1"/>
-          <p:cNvSpPr>
-            <a:spLocks noGrp="1" noRot="1" noChangeAspect="1"/>
-          </p:cNvSpPr>
-          <p:nvPr>
-            <p:ph type="sldImg"/>
-          </p:nvPr>
-        </p:nvSpPr>
-        <p:spPr/>
-      </p:sp>
-      <p:sp>
-        <p:nvSpPr>
-          <p:cNvPr id="3" name="Notes Placeholder 2"/>
-          <p:cNvSpPr>
-            <a:spLocks noGrp="1"/>
-          </p:cNvSpPr>
-          <p:nvPr>
-            <p:ph type="body" idx="1"/>
-          </p:nvPr>
-        </p:nvSpPr>
-        <p:spPr/>
-        <p:txBody>
-          <a:bodyPr/>
-          <a:lstStyle/>
-          <a:p>
-            <a:r>
-              <a:rPr lang="en-US" dirty="0"/>
-              <a:t/>
-            </a:r>
-            <a:endParaRPr lang="en-US" dirty="0"/>
-          </a:p>
-        </p:txBody>
-      </p:sp>
-      <p:sp>
-        <p:nvSpPr>
-          <p:cNvPr id="4" name="Slide Number Placeholder 3"/>
-          <p:cNvSpPr>
-            <a:spLocks noGrp="1"/>
-          </p:cNvSpPr>
-          <p:nvPr>
-            <p:ph type="sldNum" sz="quarter" idx="10"/>
-          </p:nvPr>
-        </p:nvSpPr>
-        <p:spPr/>
-        <p:txBody>
-          <a:bodyPr/>
-          <a:lstStyle/>
-          <a:p>
-            <a:fld id="{F7021451-1387-4CA6-816F-3879F97B5CBC}" type="slidenum">
-              <a:rPr lang="en-US"/>
-              <a:t>3</a:t>
-            </a:fld>
-            <a:endParaRPr lang="en-US"/>
-          </a:p>
-        </p:txBody>
-      </p:sp>
-    </p:spTree>
-    <p:extLst>
-      <p:ext uri="{BB962C8B-B14F-4D97-AF65-F5344CB8AC3E}">
-        <p14:creationId xmlns:p14="http://schemas.microsoft.com/office/powerpoint/2010/main" val="1024086991"/>
-      </p:ext>
-    </p:extLst>
-  </p:cSld>
-  <p:clrMapOvr>
-    <a:masterClrMapping/>
-  </p:clrMapOvr>
-</p:notes>
-</file>
-
-<file path=ppt/notesSlides/notesSlide4.xml><?xml version="1.0" encoding="utf-8"?>
-<p:notes xmlns:a="http://schemas.openxmlformats.org/drawingml/2006/main" xmlns:r="http://schemas.openxmlformats.org/officeDocument/2006/relationships" xmlns:p="http://schemas.openxmlformats.org/presentationml/2006/main">
-  <p:cSld>
-    <p:spTree>
-      <p:nvGrpSpPr>
-        <p:cNvPr id="1" name=""/>
-        <p:cNvGrpSpPr/>
-        <p:nvPr/>
-      </p:nvGrpSpPr>
-      <p:grpSpPr>
-        <a:xfrm>
-          <a:off x="0" y="0"/>
-          <a:ext cx="0" cy="0"/>
-          <a:chOff x="0" y="0"/>
-          <a:chExt cx="0" cy="0"/>
-        </a:xfrm>
-      </p:grpSpPr>
-      <p:sp>
-        <p:nvSpPr>
-          <p:cNvPr id="2" name="Slide Image Placeholder 1"/>
-          <p:cNvSpPr>
-            <a:spLocks noGrp="1" noRot="1" noChangeAspect="1"/>
-          </p:cNvSpPr>
-          <p:nvPr>
-            <p:ph type="sldImg"/>
-          </p:nvPr>
-        </p:nvSpPr>
-        <p:spPr/>
-      </p:sp>
-      <p:sp>
-        <p:nvSpPr>
-          <p:cNvPr id="3" name="Notes Placeholder 2"/>
-          <p:cNvSpPr>
-            <a:spLocks noGrp="1"/>
-          </p:cNvSpPr>
-          <p:nvPr>
-            <p:ph type="body" idx="1"/>
-          </p:nvPr>
-        </p:nvSpPr>
-        <p:spPr/>
-        <p:txBody>
-          <a:bodyPr/>
-          <a:lstStyle/>
-          <a:p>
-            <a:r>
-              <a:rPr lang="en-US" dirty="0"/>
-              <a:t/>
-            </a:r>
-            <a:endParaRPr lang="en-US" dirty="0"/>
-          </a:p>
-        </p:txBody>
-      </p:sp>
-      <p:sp>
-        <p:nvSpPr>
-          <p:cNvPr id="4" name="Slide Number Placeholder 3"/>
-          <p:cNvSpPr>
-            <a:spLocks noGrp="1"/>
-          </p:cNvSpPr>
-          <p:nvPr>
-            <p:ph type="sldNum" sz="quarter" idx="10"/>
-          </p:nvPr>
-        </p:nvSpPr>
-        <p:spPr/>
-        <p:txBody>
-          <a:bodyPr/>
-          <a:lstStyle/>
-          <a:p>
-            <a:fld id="{F7021451-1387-4CA6-816F-3879F97B5CBC}" type="slidenum">
-              <a:rPr lang="en-US"/>
-              <a:t>4</a:t>
-            </a:fld>
-            <a:endParaRPr lang="en-US"/>
-          </a:p>
-        </p:txBody>
-      </p:sp>
-    </p:spTree>
-    <p:extLst>
-      <p:ext uri="{BB962C8B-B14F-4D97-AF65-F5344CB8AC3E}">
-        <p14:creationId xmlns:p14="http://schemas.microsoft.com/office/powerpoint/2010/main" val="1024086991"/>
-      </p:ext>
-    </p:extLst>
-  </p:cSld>
-  <p:clrMapOvr>
-    <a:masterClrMapping/>
-  </p:clrMapOvr>
-</p:notes>
-</file>
-
-<file path=ppt/notesSlides/notesSlide5.xml><?xml version="1.0" encoding="utf-8"?>
-<p:notes xmlns:a="http://schemas.openxmlformats.org/drawingml/2006/main" xmlns:r="http://schemas.openxmlformats.org/officeDocument/2006/relationships" xmlns:p="http://schemas.openxmlformats.org/presentationml/2006/main">
-  <p:cSld>
-    <p:spTree>
-      <p:nvGrpSpPr>
-        <p:cNvPr id="1" name=""/>
-        <p:cNvGrpSpPr/>
-        <p:nvPr/>
-      </p:nvGrpSpPr>
-      <p:grpSpPr>
-        <a:xfrm>
-          <a:off x="0" y="0"/>
-          <a:ext cx="0" cy="0"/>
-          <a:chOff x="0" y="0"/>
-          <a:chExt cx="0" cy="0"/>
-        </a:xfrm>
-      </p:grpSpPr>
-      <p:sp>
-        <p:nvSpPr>
-          <p:cNvPr id="2" name="Slide Image Placeholder 1"/>
-          <p:cNvSpPr>
-            <a:spLocks noGrp="1" noRot="1" noChangeAspect="1"/>
-          </p:cNvSpPr>
-          <p:nvPr>
-            <p:ph type="sldImg"/>
-          </p:nvPr>
-        </p:nvSpPr>
-        <p:spPr/>
-      </p:sp>
-      <p:sp>
-        <p:nvSpPr>
-          <p:cNvPr id="3" name="Notes Placeholder 2"/>
-          <p:cNvSpPr>
-            <a:spLocks noGrp="1"/>
-          </p:cNvSpPr>
-          <p:nvPr>
-            <p:ph type="body" idx="1"/>
-          </p:nvPr>
-        </p:nvSpPr>
-        <p:spPr/>
-        <p:txBody>
-          <a:bodyPr/>
-          <a:lstStyle/>
-          <a:p>
-            <a:r>
-              <a:rPr lang="en-US" dirty="0"/>
-              <a:t/>
-            </a:r>
-            <a:endParaRPr lang="en-US" dirty="0"/>
-          </a:p>
-        </p:txBody>
-      </p:sp>
-      <p:sp>
-        <p:nvSpPr>
-          <p:cNvPr id="4" name="Slide Number Placeholder 3"/>
-          <p:cNvSpPr>
-            <a:spLocks noGrp="1"/>
-          </p:cNvSpPr>
-          <p:nvPr>
-            <p:ph type="sldNum" sz="quarter" idx="10"/>
-          </p:nvPr>
-        </p:nvSpPr>
-        <p:spPr/>
-        <p:txBody>
-          <a:bodyPr/>
-          <a:lstStyle/>
-          <a:p>
-            <a:fld id="{F7021451-1387-4CA6-816F-3879F97B5CBC}" type="slidenum">
-              <a:rPr lang="en-US"/>
-              <a:t>5</a:t>
-            </a:fld>
-            <a:endParaRPr lang="en-US"/>
-          </a:p>
-        </p:txBody>
-      </p:sp>
-    </p:spTree>
-    <p:extLst>
-      <p:ext uri="{BB962C8B-B14F-4D97-AF65-F5344CB8AC3E}">
-        <p14:creationId xmlns:p14="http://schemas.microsoft.com/office/powerpoint/2010/main" val="1024086991"/>
-      </p:ext>
-    </p:extLst>
-  </p:cSld>
-  <p:clrMapOvr>
-    <a:masterClrMapping/>
-  </p:clrMapOvr>
-</p:notes>
-</file>
-
-<file path=ppt/notesSlides/notesSlide6.xml><?xml version="1.0" encoding="utf-8"?>
-<p:notes xmlns:a="http://schemas.openxmlformats.org/drawingml/2006/main" xmlns:r="http://schemas.openxmlformats.org/officeDocument/2006/relationships" xmlns:p="http://schemas.openxmlformats.org/presentationml/2006/main">
-  <p:cSld>
-    <p:spTree>
-      <p:nvGrpSpPr>
-        <p:cNvPr id="1" name=""/>
-        <p:cNvGrpSpPr/>
-        <p:nvPr/>
-      </p:nvGrpSpPr>
-      <p:grpSpPr>
-        <a:xfrm>
-          <a:off x="0" y="0"/>
-          <a:ext cx="0" cy="0"/>
-          <a:chOff x="0" y="0"/>
-          <a:chExt cx="0" cy="0"/>
-        </a:xfrm>
-      </p:grpSpPr>
-      <p:sp>
-        <p:nvSpPr>
-          <p:cNvPr id="2" name="Slide Image Placeholder 1"/>
-          <p:cNvSpPr>
-            <a:spLocks noGrp="1" noRot="1" noChangeAspect="1"/>
-          </p:cNvSpPr>
-          <p:nvPr>
-            <p:ph type="sldImg"/>
-          </p:nvPr>
-        </p:nvSpPr>
-        <p:spPr/>
-      </p:sp>
-      <p:sp>
-        <p:nvSpPr>
-          <p:cNvPr id="3" name="Notes Placeholder 2"/>
-          <p:cNvSpPr>
-            <a:spLocks noGrp="1"/>
-          </p:cNvSpPr>
-          <p:nvPr>
-            <p:ph type="body" idx="1"/>
-          </p:nvPr>
-        </p:nvSpPr>
-        <p:spPr/>
-        <p:txBody>
-          <a:bodyPr/>
-          <a:lstStyle/>
-          <a:p>
-            <a:r>
-              <a:rPr lang="en-US" dirty="0"/>
-              <a:t/>
-            </a:r>
-            <a:endParaRPr lang="en-US" dirty="0"/>
-          </a:p>
-        </p:txBody>
-      </p:sp>
-      <p:sp>
-        <p:nvSpPr>
-          <p:cNvPr id="4" name="Slide Number Placeholder 3"/>
-          <p:cNvSpPr>
-            <a:spLocks noGrp="1"/>
-          </p:cNvSpPr>
-          <p:nvPr>
-            <p:ph type="sldNum" sz="quarter" idx="10"/>
-          </p:nvPr>
-        </p:nvSpPr>
-        <p:spPr/>
-        <p:txBody>
-          <a:bodyPr/>
-          <a:lstStyle/>
-          <a:p>
-            <a:fld id="{F7021451-1387-4CA6-816F-3879F97B5CBC}" type="slidenum">
-              <a:rPr lang="en-US"/>
-              <a:t>6</a:t>
-            </a:fld>
-            <a:endParaRPr lang="en-US"/>
-          </a:p>
-        </p:txBody>
-      </p:sp>
-    </p:spTree>
-    <p:extLst>
-      <p:ext uri="{BB962C8B-B14F-4D97-AF65-F5344CB8AC3E}">
-        <p14:creationId xmlns:p14="http://schemas.microsoft.com/office/powerpoint/2010/main" val="1024086991"/>
-      </p:ext>
-    </p:extLst>
-  </p:cSld>
-  <p:clrMapOvr>
-    <a:masterClrMapping/>
-  </p:clrMapOvr>
-</p:notes>
-</file>
-
-<file path=ppt/notesSlides/notesSlide7.xml><?xml version="1.0" encoding="utf-8"?>
-<p:notes xmlns:a="http://schemas.openxmlformats.org/drawingml/2006/main" xmlns:r="http://schemas.openxmlformats.org/officeDocument/2006/relationships" xmlns:p="http://schemas.openxmlformats.org/presentationml/2006/main">
-  <p:cSld>
-    <p:spTree>
-      <p:nvGrpSpPr>
-        <p:cNvPr id="1" name=""/>
-        <p:cNvGrpSpPr/>
-        <p:nvPr/>
-      </p:nvGrpSpPr>
-      <p:grpSpPr>
-        <a:xfrm>
-          <a:off x="0" y="0"/>
-          <a:ext cx="0" cy="0"/>
-          <a:chOff x="0" y="0"/>
-          <a:chExt cx="0" cy="0"/>
-        </a:xfrm>
-      </p:grpSpPr>
-      <p:sp>
-        <p:nvSpPr>
-          <p:cNvPr id="2" name="Slide Image Placeholder 1"/>
-          <p:cNvSpPr>
-            <a:spLocks noGrp="1" noRot="1" noChangeAspect="1"/>
-          </p:cNvSpPr>
-          <p:nvPr>
-            <p:ph type="sldImg"/>
-          </p:nvPr>
-        </p:nvSpPr>
-        <p:spPr/>
-      </p:sp>
-      <p:sp>
-        <p:nvSpPr>
-          <p:cNvPr id="3" name="Notes Placeholder 2"/>
-          <p:cNvSpPr>
-            <a:spLocks noGrp="1"/>
-          </p:cNvSpPr>
-          <p:nvPr>
-            <p:ph type="body" idx="1"/>
-          </p:nvPr>
-        </p:nvSpPr>
-        <p:spPr/>
-        <p:txBody>
-          <a:bodyPr/>
-          <a:lstStyle/>
-          <a:p>
-            <a:r>
-              <a:rPr lang="en-US" dirty="0"/>
-              <a:t/>
-            </a:r>
-            <a:endParaRPr lang="en-US" dirty="0"/>
-          </a:p>
-        </p:txBody>
-      </p:sp>
-      <p:sp>
-        <p:nvSpPr>
-          <p:cNvPr id="4" name="Slide Number Placeholder 3"/>
-          <p:cNvSpPr>
-            <a:spLocks noGrp="1"/>
-          </p:cNvSpPr>
-          <p:nvPr>
-            <p:ph type="sldNum" sz="quarter" idx="10"/>
-          </p:nvPr>
-        </p:nvSpPr>
-        <p:spPr/>
-        <p:txBody>
-          <a:bodyPr/>
-          <a:lstStyle/>
-          <a:p>
-            <a:fld id="{F7021451-1387-4CA6-816F-3879F97B5CBC}" type="slidenum">
-              <a:rPr lang="en-US"/>
-              <a:t>7</a:t>
-            </a:fld>
-            <a:endParaRPr lang="en-US"/>
-          </a:p>
-        </p:txBody>
-      </p:sp>
-    </p:spTree>
-    <p:extLst>
-      <p:ext uri="{BB962C8B-B14F-4D97-AF65-F5344CB8AC3E}">
-        <p14:creationId xmlns:p14="http://schemas.microsoft.com/office/powerpoint/2010/main" val="1024086991"/>
-      </p:ext>
-    </p:extLst>
-  </p:cSld>
-  <p:clrMapOvr>
-    <a:masterClrMapping/>
-  </p:clrMapOvr>
-</p:notes>
-</file>
-
-<file path=ppt/notesSlides/notesSlide8.xml><?xml version="1.0" encoding="utf-8"?>
-<p:notes xmlns:a="http://schemas.openxmlformats.org/drawingml/2006/main" xmlns:r="http://schemas.openxmlformats.org/officeDocument/2006/relationships" xmlns:p="http://schemas.openxmlformats.org/presentationml/2006/main">
-  <p:cSld>
-    <p:spTree>
-      <p:nvGrpSpPr>
-        <p:cNvPr id="1" name=""/>
-        <p:cNvGrpSpPr/>
-        <p:nvPr/>
-      </p:nvGrpSpPr>
-      <p:grpSpPr>
-        <a:xfrm>
-          <a:off x="0" y="0"/>
-          <a:ext cx="0" cy="0"/>
-          <a:chOff x="0" y="0"/>
-          <a:chExt cx="0" cy="0"/>
-        </a:xfrm>
-      </p:grpSpPr>
-      <p:sp>
-        <p:nvSpPr>
-          <p:cNvPr id="2" name="Slide Image Placeholder 1"/>
-          <p:cNvSpPr>
-            <a:spLocks noGrp="1" noRot="1" noChangeAspect="1"/>
-          </p:cNvSpPr>
-          <p:nvPr>
-            <p:ph type="sldImg"/>
-          </p:nvPr>
-        </p:nvSpPr>
-        <p:spPr/>
-      </p:sp>
-      <p:sp>
-        <p:nvSpPr>
-          <p:cNvPr id="3" name="Notes Placeholder 2"/>
-          <p:cNvSpPr>
-            <a:spLocks noGrp="1"/>
-          </p:cNvSpPr>
-          <p:nvPr>
-            <p:ph type="body" idx="1"/>
-          </p:nvPr>
-        </p:nvSpPr>
-        <p:spPr/>
-        <p:txBody>
-          <a:bodyPr/>
-          <a:lstStyle/>
-          <a:p>
-            <a:r>
-              <a:rPr lang="en-US" dirty="0"/>
-              <a:t/>
-            </a:r>
-            <a:endParaRPr lang="en-US" dirty="0"/>
-          </a:p>
-        </p:txBody>
-      </p:sp>
-      <p:sp>
-        <p:nvSpPr>
-          <p:cNvPr id="4" name="Slide Number Placeholder 3"/>
-          <p:cNvSpPr>
-            <a:spLocks noGrp="1"/>
-          </p:cNvSpPr>
-          <p:nvPr>
-            <p:ph type="sldNum" sz="quarter" idx="10"/>
-          </p:nvPr>
-        </p:nvSpPr>
-        <p:spPr/>
-        <p:txBody>
-          <a:bodyPr/>
-          <a:lstStyle/>
-          <a:p>
-            <a:fld id="{F7021451-1387-4CA6-816F-3879F97B5CBC}" type="slidenum">
-              <a:rPr lang="en-US"/>
-              <a:t>8</a:t>
-            </a:fld>
-            <a:endParaRPr lang="en-US"/>
-          </a:p>
-        </p:txBody>
-      </p:sp>
-    </p:spTree>
-    <p:extLst>
-      <p:ext uri="{BB962C8B-B14F-4D97-AF65-F5344CB8AC3E}">
-        <p14:creationId xmlns:p14="http://schemas.microsoft.com/office/powerpoint/2010/main" val="1024086991"/>
-      </p:ext>
-    </p:extLst>
-  </p:cSld>
-  <p:clrMapOvr>
-    <a:masterClrMapping/>
-  </p:clrMapOvr>
-</p:notes>
-</file>
-
-<file path=ppt/notesSlides/notesSlide9.xml><?xml version="1.0" encoding="utf-8"?>
-<p:notes xmlns:a="http://schemas.openxmlformats.org/drawingml/2006/main" xmlns:r="http://schemas.openxmlformats.org/officeDocument/2006/relationships" xmlns:p="http://schemas.openxmlformats.org/presentationml/2006/main">
-  <p:cSld>
-    <p:spTree>
-      <p:nvGrpSpPr>
-        <p:cNvPr id="1" name=""/>
-        <p:cNvGrpSpPr/>
-        <p:nvPr/>
-      </p:nvGrpSpPr>
-      <p:grpSpPr>
-        <a:xfrm>
-          <a:off x="0" y="0"/>
-          <a:ext cx="0" cy="0"/>
-          <a:chOff x="0" y="0"/>
-          <a:chExt cx="0" cy="0"/>
-        </a:xfrm>
-      </p:grpSpPr>
-      <p:sp>
-        <p:nvSpPr>
-          <p:cNvPr id="2" name="Slide Image Placeholder 1"/>
-          <p:cNvSpPr>
-            <a:spLocks noGrp="1" noRot="1" noChangeAspect="1"/>
-          </p:cNvSpPr>
-          <p:nvPr>
-            <p:ph type="sldImg"/>
-          </p:nvPr>
-        </p:nvSpPr>
-        <p:spPr/>
-      </p:sp>
-      <p:sp>
-        <p:nvSpPr>
-          <p:cNvPr id="3" name="Notes Placeholder 2"/>
-          <p:cNvSpPr>
-            <a:spLocks noGrp="1"/>
-          </p:cNvSpPr>
-          <p:nvPr>
-            <p:ph type="body" idx="1"/>
-          </p:nvPr>
-        </p:nvSpPr>
-        <p:spPr/>
-        <p:txBody>
-          <a:bodyPr/>
-          <a:lstStyle/>
-          <a:p>
-            <a:r>
-              <a:rPr lang="en-US" dirty="0"/>
-              <a:t/>
-            </a:r>
-            <a:endParaRPr lang="en-US" dirty="0"/>
-          </a:p>
-        </p:txBody>
-      </p:sp>
-      <p:sp>
-        <p:nvSpPr>
-          <p:cNvPr id="4" name="Slide Number Placeholder 3"/>
-          <p:cNvSpPr>
-            <a:spLocks noGrp="1"/>
-          </p:cNvSpPr>
-          <p:nvPr>
-            <p:ph type="sldNum" sz="quarter" idx="10"/>
-          </p:nvPr>
-        </p:nvSpPr>
-        <p:spPr/>
-        <p:txBody>
-          <a:bodyPr/>
-          <a:lstStyle/>
-          <a:p>
-            <a:fld id="{F7021451-1387-4CA6-816F-3879F97B5CBC}" type="slidenum">
-              <a:rPr lang="en-US"/>
-              <a:t>9</a:t>
-            </a:fld>
-            <a:endParaRPr lang="en-US"/>
-          </a:p>
-        </p:txBody>
-      </p:sp>
-    </p:spTree>
-    <p:extLst>
-      <p:ext uri="{BB962C8B-B14F-4D97-AF65-F5344CB8AC3E}">
-        <p14:creationId xmlns:p14="http://schemas.microsoft.com/office/powerpoint/2010/main" val="1024086991"/>
-      </p:ext>
-    </p:extLst>
-  </p:cSld>
-  <p:clrMapOvr>
-    <a:masterClrMapping/>
-  </p:clrMapOvr>
-</p:notes>
-</file>
-
-<file path=ppt/slideLayouts/slideLayout1.xml><?xml version="1.0" encoding="utf-8"?>
+<file path=ppt\slideLayouts\slideLayout1.xml><?xml version="1.0" encoding="utf-8"?>
 <p:sldLayout xmlns:a="http://schemas.openxmlformats.org/drawingml/2006/main" xmlns:r="http://schemas.openxmlformats.org/officeDocument/2006/relationships" xmlns:p="http://schemas.openxmlformats.org/presentationml/2006/main" preserve="1">
   <p:cSld name="DEFAULT">
     <p:bg>
@@ -2087,7 +2680,7 @@
 </p:sldLayout>
 </file>
 
-<file path=ppt/slideMasters/slideMaster1.xml><?xml version="1.0" encoding="utf-8"?>
+<file path=ppt\slideMasters\slideMaster1.xml><?xml version="1.0" encoding="utf-8"?>
 <p:sldMaster xmlns:a="http://schemas.openxmlformats.org/drawingml/2006/main" xmlns:r="http://schemas.openxmlformats.org/officeDocument/2006/relationships" xmlns:p="http://schemas.openxmlformats.org/presentationml/2006/main">
   <p:cSld>
     <p:spTree>
@@ -2364,7 +2957,7 @@
 </p:sldMaster>
 </file>
 
-<file path=ppt/slides/slide1.xml><?xml version="1.0" encoding="utf-8"?>
+<file path=ppt\slides\slide1.xml><?xml version="1.0" encoding="utf-8"?>
 <p:sld xmlns:a="http://schemas.openxmlformats.org/drawingml/2006/main" xmlns:r="http://schemas.openxmlformats.org/officeDocument/2006/relationships" xmlns:p="http://schemas.openxmlformats.org/presentationml/2006/main">
   <p:cSld name="Slide 1">
     <p:spTree>
@@ -2764,7 +3357,7 @@
 </p:sld>
 </file>
 
-<file path=ppt/slides/slide10.xml><?xml version="1.0" encoding="utf-8"?>
+<file path=ppt\slides\slide10.xml><?xml version="1.0" encoding="utf-8"?>
 <p:sld xmlns:a="http://schemas.openxmlformats.org/drawingml/2006/main" xmlns:r="http://schemas.openxmlformats.org/officeDocument/2006/relationships" xmlns:p="http://schemas.openxmlformats.org/presentationml/2006/main">
   <p:cSld name="Slide 10">
     <p:spTree>
@@ -3884,7 +4477,7 @@
 </p:sld>
 </file>
 
-<file path=ppt/slides/slide11.xml><?xml version="1.0" encoding="utf-8"?>
+<file path=ppt\slides\slide11.xml><?xml version="1.0" encoding="utf-8"?>
 <p:sld xmlns:a="http://schemas.openxmlformats.org/drawingml/2006/main" xmlns:r="http://schemas.openxmlformats.org/officeDocument/2006/relationships" xmlns:p="http://schemas.openxmlformats.org/presentationml/2006/main">
   <p:cSld name="Slide 11">
     <p:spTree>
@@ -4952,7 +5545,7 @@
 </p:sld>
 </file>
 
-<file path=ppt/slides/slide12.xml><?xml version="1.0" encoding="utf-8"?>
+<file path=ppt\slides\slide12.xml><?xml version="1.0" encoding="utf-8"?>
 <p:sld xmlns:a="http://schemas.openxmlformats.org/drawingml/2006/main" xmlns:r="http://schemas.openxmlformats.org/officeDocument/2006/relationships" xmlns:p="http://schemas.openxmlformats.org/presentationml/2006/main">
   <p:cSld name="Slide 12">
     <p:spTree>
@@ -5915,7 +6508,7 @@
 </p:sld>
 </file>
 
-<file path=ppt/slides/slide13.xml><?xml version="1.0" encoding="utf-8"?>
+<file path=ppt\slides\slide13.xml><?xml version="1.0" encoding="utf-8"?>
 <p:sld xmlns:a="http://schemas.openxmlformats.org/drawingml/2006/main" xmlns:r="http://schemas.openxmlformats.org/officeDocument/2006/relationships" xmlns:p="http://schemas.openxmlformats.org/presentationml/2006/main">
   <p:cSld name="Slide 13">
     <p:spTree>
@@ -8238,7 +8831,7 @@
 </p:sld>
 </file>
 
-<file path=ppt/slides/slide14.xml><?xml version="1.0" encoding="utf-8"?>
+<file path=ppt\slides\slide14.xml><?xml version="1.0" encoding="utf-8"?>
 <p:sld xmlns:a="http://schemas.openxmlformats.org/drawingml/2006/main" xmlns:r="http://schemas.openxmlformats.org/officeDocument/2006/relationships" xmlns:p="http://schemas.openxmlformats.org/presentationml/2006/main">
   <p:cSld name="Slide 14">
     <p:spTree>
@@ -9003,7 +9596,7 @@
 </p:sld>
 </file>
 
-<file path=ppt/slides/slide15.xml><?xml version="1.0" encoding="utf-8"?>
+<file path=ppt\slides\slide15.xml><?xml version="1.0" encoding="utf-8"?>
 <p:sld xmlns:a="http://schemas.openxmlformats.org/drawingml/2006/main" xmlns:r="http://schemas.openxmlformats.org/officeDocument/2006/relationships" xmlns:p="http://schemas.openxmlformats.org/presentationml/2006/main">
   <p:cSld name="Slide 15">
     <p:spTree>
@@ -11280,7 +11873,7 @@
 </p:sld>
 </file>
 
-<file path=ppt/slides/slide16.xml><?xml version="1.0" encoding="utf-8"?>
+<file path=ppt\slides\slide16.xml><?xml version="1.0" encoding="utf-8"?>
 <p:sld xmlns:a="http://schemas.openxmlformats.org/drawingml/2006/main" xmlns:r="http://schemas.openxmlformats.org/officeDocument/2006/relationships" xmlns:p="http://schemas.openxmlformats.org/presentationml/2006/main">
   <p:cSld name="Slide 16">
     <p:spTree>
@@ -12045,7 +12638,7 @@
 </p:sld>
 </file>
 
-<file path=ppt/slides/slide17.xml><?xml version="1.0" encoding="utf-8"?>
+<file path=ppt\slides\slide17.xml><?xml version="1.0" encoding="utf-8"?>
 <p:sld xmlns:a="http://schemas.openxmlformats.org/drawingml/2006/main" xmlns:r="http://schemas.openxmlformats.org/officeDocument/2006/relationships" xmlns:p="http://schemas.openxmlformats.org/presentationml/2006/main">
   <p:cSld name="Slide 17">
     <p:spTree>
@@ -12913,7 +13506,7 @@
 </p:sld>
 </file>
 
-<file path=ppt/slides/slide18.xml><?xml version="1.0" encoding="utf-8"?>
+<file path=ppt\slides\slide18.xml><?xml version="1.0" encoding="utf-8"?>
 <p:sld xmlns:a="http://schemas.openxmlformats.org/drawingml/2006/main" xmlns:r="http://schemas.openxmlformats.org/officeDocument/2006/relationships" xmlns:p="http://schemas.openxmlformats.org/presentationml/2006/main">
   <p:cSld name="Slide 18">
     <p:spTree>
@@ -13257,7 +13850,7 @@
 </p:sld>
 </file>
 
-<file path=ppt/slides/slide2.xml><?xml version="1.0" encoding="utf-8"?>
+<file path=ppt\slides\slide2.xml><?xml version="1.0" encoding="utf-8"?>
 <p:sld xmlns:a="http://schemas.openxmlformats.org/drawingml/2006/main" xmlns:r="http://schemas.openxmlformats.org/officeDocument/2006/relationships" xmlns:p="http://schemas.openxmlformats.org/presentationml/2006/main">
   <p:cSld name="Slide 2">
     <p:spTree>
@@ -14331,7 +14924,7 @@
 </p:sld>
 </file>
 
-<file path=ppt/slides/slide3.xml><?xml version="1.0" encoding="utf-8"?>
+<file path=ppt\slides\slide3.xml><?xml version="1.0" encoding="utf-8"?>
 <p:sld xmlns:a="http://schemas.openxmlformats.org/drawingml/2006/main" xmlns:r="http://schemas.openxmlformats.org/officeDocument/2006/relationships" xmlns:p="http://schemas.openxmlformats.org/presentationml/2006/main">
   <p:cSld name="Slide 3">
     <p:spTree>
@@ -14832,7 +15425,7 @@
 </p:sld>
 </file>
 
-<file path=ppt/slides/slide4.xml><?xml version="1.0" encoding="utf-8"?>
+<file path=ppt\slides\slide4.xml><?xml version="1.0" encoding="utf-8"?>
 <p:sld xmlns:a="http://schemas.openxmlformats.org/drawingml/2006/main" xmlns:r="http://schemas.openxmlformats.org/officeDocument/2006/relationships" xmlns:p="http://schemas.openxmlformats.org/presentationml/2006/main">
   <p:cSld name="Slide 4">
     <p:spTree>
@@ -15494,7 +16087,7 @@
 </p:sld>
 </file>
 
-<file path=ppt/slides/slide5.xml><?xml version="1.0" encoding="utf-8"?>
+<file path=ppt\slides\slide5.xml><?xml version="1.0" encoding="utf-8"?>
 <p:sld xmlns:a="http://schemas.openxmlformats.org/drawingml/2006/main" xmlns:r="http://schemas.openxmlformats.org/officeDocument/2006/relationships" xmlns:p="http://schemas.openxmlformats.org/presentationml/2006/main">
   <p:cSld name="Slide 5">
     <p:spTree>
@@ -16112,7 +16705,7 @@
 </p:sld>
 </file>
 
-<file path=ppt/slides/slide6.xml><?xml version="1.0" encoding="utf-8"?>
+<file path=ppt\slides\slide6.xml><?xml version="1.0" encoding="utf-8"?>
 <p:sld xmlns:a="http://schemas.openxmlformats.org/drawingml/2006/main" xmlns:r="http://schemas.openxmlformats.org/officeDocument/2006/relationships" xmlns:p="http://schemas.openxmlformats.org/presentationml/2006/main">
   <p:cSld name="Slide 6">
     <p:spTree>
@@ -17588,7 +18181,7 @@
 </p:sld>
 </file>
 
-<file path=ppt/slides/slide7.xml><?xml version="1.0" encoding="utf-8"?>
+<file path=ppt\slides\slide7.xml><?xml version="1.0" encoding="utf-8"?>
 <p:sld xmlns:a="http://schemas.openxmlformats.org/drawingml/2006/main" xmlns:r="http://schemas.openxmlformats.org/officeDocument/2006/relationships" xmlns:p="http://schemas.openxmlformats.org/presentationml/2006/main">
   <p:cSld name="Slide 7">
     <p:spTree>
@@ -18526,7 +19119,7 @@
 </p:sld>
 </file>
 
-<file path=ppt/slides/slide8.xml><?xml version="1.0" encoding="utf-8"?>
+<file path=ppt\slides\slide8.xml><?xml version="1.0" encoding="utf-8"?>
 <p:sld xmlns:a="http://schemas.openxmlformats.org/drawingml/2006/main" xmlns:r="http://schemas.openxmlformats.org/officeDocument/2006/relationships" xmlns:p="http://schemas.openxmlformats.org/presentationml/2006/main">
   <p:cSld name="Slide 8">
     <p:spTree>
@@ -19445,7 +20038,7 @@
 </p:sld>
 </file>
 
-<file path=ppt/slides/slide9.xml><?xml version="1.0" encoding="utf-8"?>
+<file path=ppt\slides\slide9.xml><?xml version="1.0" encoding="utf-8"?>
 <p:sld xmlns:a="http://schemas.openxmlformats.org/drawingml/2006/main" xmlns:r="http://schemas.openxmlformats.org/officeDocument/2006/relationships" xmlns:p="http://schemas.openxmlformats.org/presentationml/2006/main">
   <p:cSld name="Slide 9">
     <p:spTree>
@@ -21644,7 +22237,11 @@
 </p:sld>
 </file>
 
-<file path=ppt/theme/theme1.xml><?xml version="1.0" encoding="utf-8"?>
+<file path=ppt\tableStyles.xml><?xml version="1.0" encoding="utf-8"?>
+<a:tblStyleLst xmlns:a="http://schemas.openxmlformats.org/drawingml/2006/main" def="{5C22544A-7EE6-4342-B048-85BDC9FD1C3A}"/>
+</file>
+
+<file path=ppt\theme\theme1.xml><?xml version="1.0" encoding="utf-8"?>
 <a:theme xmlns:a="http://schemas.openxmlformats.org/drawingml/2006/main" name="Office Theme">
   <a:themeElements>
     <a:clrScheme name="Office">
@@ -21937,4 +22534,35 @@
     </a:ext>
   </a:extLst>
 </a:theme>
+</file>
+
+<file path=ppt\viewProps.xml><?xml version="1.0" encoding="utf-8"?>
+<p:viewPr xmlns:a="http://schemas.openxmlformats.org/drawingml/2006/main" xmlns:r="http://schemas.openxmlformats.org/officeDocument/2006/relationships" xmlns:p="http://schemas.openxmlformats.org/presentationml/2006/main">
+  <p:normalViewPr horzBarState="maximized">
+    <p:restoredLeft sz="15611"/>
+    <p:restoredTop sz="94610"/>
+  </p:normalViewPr>
+  <p:slideViewPr>
+    <p:cSldViewPr snapToGrid="0" snapToObjects="1">
+      <p:cViewPr varScale="1">
+        <p:scale>
+          <a:sx n="136" d="100"/>
+          <a:sy n="136" d="100"/>
+        </p:scale>
+        <p:origin x="216" y="312"/>
+      </p:cViewPr>
+      <p:guideLst/>
+    </p:cSldViewPr>
+  </p:slideViewPr>
+  <p:notesTextViewPr>
+    <p:cViewPr>
+      <p:scale>
+        <a:sx n="1" d="1"/>
+        <a:sy n="1" d="1"/>
+      </p:scale>
+      <p:origin x="0" y="0"/>
+    </p:cViewPr>
+  </p:notesTextViewPr>
+  <p:gridSpacing cx="76200" cy="76200"/>
+</p:viewPr>
 </file>